--- a/presentaciones/insights_distribuidoras.pptx
+++ b/presentaciones/insights_distribuidoras.pptx
@@ -13,9 +13,10 @@
     <p:sldId id="261" r:id="rId7"/>
     <p:sldId id="262" r:id="rId8"/>
     <p:sldId id="263" r:id="rId9"/>
+    <p:sldId id="264" r:id="rId10"/>
   </p:sldIdLst>
   <p:notesMasterIdLst>
-    <p:notesMasterId r:id="rId10"/>
+    <p:notesMasterId r:id="rId11"/>
   </p:notesMasterIdLst>
   <p:sldSz cx="12192000" cy="6858000"/>
   <p:notesSz cx="6858000" cy="12192000"/>
@@ -128,7 +129,7 @@
             <a:pPr>
               <a:defRPr sz="1400" b="0" i="0" u="none" strike="noStrike">
                 <a:solidFill>
-                  <a:srgbClr val="36454F"/>
+                  <a:srgbClr val="32373C"/>
                 </a:solidFill>
                 <a:latin typeface="Calibri"/>
               </a:defRPr>
@@ -136,7 +137,7 @@
             <a:r>
               <a:rPr sz="1400" b="0" i="0" u="none" strike="noStrike">
                 <a:solidFill>
-                  <a:srgbClr val="36454F"/>
+                  <a:srgbClr val="32373C"/>
                 </a:solidFill>
                 <a:latin typeface="Calibri"/>
               </a:rPr>
@@ -171,7 +172,7 @@
           </c:tx>
           <c:spPr>
             <a:solidFill>
-              <a:srgbClr val="CADCFC"/>
+              <a:srgbClr val="C9BEDD"/>
             </a:solidFill>
             <a:effectLst/>
           </c:spPr>
@@ -185,7 +186,7 @@
                 <a:pPr>
                   <a:defRPr b="0" i="0" strike="noStrike" sz="1200" u="none">
                     <a:solidFill>
-                      <a:srgbClr val="36454F"/>
+                      <a:srgbClr val="32373C"/>
                     </a:solidFill>
                     <a:latin typeface="Arial"/>
                   </a:defRPr>
@@ -206,7 +207,7 @@
             <c:bubble3D val="0"/>
             <c:spPr>
               <a:solidFill>
-                <a:srgbClr val="CADCFC"/>
+                <a:srgbClr val="C9BEDD"/>
               </a:solidFill>
               <a:effectLst/>
             </c:spPr>
@@ -217,7 +218,7 @@
             <c:bubble3D val="0"/>
             <c:spPr>
               <a:solidFill>
-                <a:srgbClr val="CADCFC"/>
+                <a:srgbClr val="C9BEDD"/>
               </a:solidFill>
               <a:effectLst/>
             </c:spPr>
@@ -228,7 +229,7 @@
             <c:bubble3D val="0"/>
             <c:spPr>
               <a:solidFill>
-                <a:srgbClr val="CADCFC"/>
+                <a:srgbClr val="C9BEDD"/>
               </a:solidFill>
               <a:effectLst/>
             </c:spPr>
@@ -239,7 +240,7 @@
             <c:bubble3D val="0"/>
             <c:spPr>
               <a:solidFill>
-                <a:srgbClr val="CADCFC"/>
+                <a:srgbClr val="C9BEDD"/>
               </a:solidFill>
               <a:effectLst/>
             </c:spPr>
@@ -250,7 +251,7 @@
             <c:bubble3D val="0"/>
             <c:spPr>
               <a:solidFill>
-                <a:srgbClr val="F96167"/>
+                <a:srgbClr val="44C5E3"/>
               </a:solidFill>
               <a:effectLst/>
             </c:spPr>
@@ -314,7 +315,7 @@
               <a:pPr>
                 <a:defRPr b="0" i="0" strike="noStrike" sz="1200" u="none">
                   <a:solidFill>
-                    <a:srgbClr val="36454F"/>
+                    <a:srgbClr val="32373C"/>
                   </a:solidFill>
                   <a:latin typeface="Arial"/>
                 </a:defRPr>
@@ -362,7 +363,7 @@
             <a:pPr>
               <a:defRPr sz="1200" b="0" i="0" u="none" strike="noStrike">
                 <a:solidFill>
-                  <a:srgbClr val="36454F"/>
+                  <a:srgbClr val="32373C"/>
                 </a:solidFill>
                 <a:latin typeface="Arial"/>
               </a:defRPr>
@@ -417,7 +418,7 @@
       </c:valAx>
       <c:spPr>
         <a:solidFill>
-          <a:srgbClr val="F7F8FC"/>
+          <a:srgbClr val="F5F3FA"/>
         </a:solidFill>
         <a:ln>
           <a:noFill/>
@@ -483,7 +484,7 @@
             <c:bubble3D val="0"/>
             <c:spPr>
               <a:solidFill>
-                <a:srgbClr val="1E2761"/>
+                <a:srgbClr val="4A3184"/>
               </a:solidFill>
               <a:ln w="25400" cap="flat">
                 <a:solidFill>
@@ -500,7 +501,7 @@
             <c:bubble3D val="0"/>
             <c:spPr>
               <a:solidFill>
-                <a:srgbClr val="CADCFC"/>
+                <a:srgbClr val="C9BEDD"/>
               </a:solidFill>
               <a:ln w="25400" cap="flat">
                 <a:solidFill>
@@ -636,7 +637,7 @@
           <a:pPr>
             <a:defRPr sz="1300">
               <a:solidFill>
-                <a:srgbClr val="36454F"/>
+                <a:srgbClr val="32373C"/>
               </a:solidFill>
             </a:defRPr>
           </a:pPr>
@@ -674,7 +675,7 @@
             <a:pPr>
               <a:defRPr sz="1300" b="0" i="0" u="none" strike="noStrike">
                 <a:solidFill>
-                  <a:srgbClr val="36454F"/>
+                  <a:srgbClr val="32373C"/>
                 </a:solidFill>
                 <a:latin typeface="Calibri"/>
               </a:defRPr>
@@ -682,7 +683,7 @@
             <a:r>
               <a:rPr sz="1300" b="0" i="0" u="none" strike="noStrike">
                 <a:solidFill>
-                  <a:srgbClr val="36454F"/>
+                  <a:srgbClr val="32373C"/>
                 </a:solidFill>
                 <a:latin typeface="Calibri"/>
               </a:rPr>
@@ -717,7 +718,7 @@
           </c:tx>
           <c:spPr>
             <a:solidFill>
-              <a:srgbClr val="CADCFC"/>
+              <a:srgbClr val="C9BEDD"/>
             </a:solidFill>
             <a:effectLst/>
           </c:spPr>
@@ -731,7 +732,7 @@
                 <a:pPr>
                   <a:defRPr b="0" i="0" strike="noStrike" sz="1100" u="none">
                     <a:solidFill>
-                      <a:srgbClr val="36454F"/>
+                      <a:srgbClr val="32373C"/>
                     </a:solidFill>
                     <a:latin typeface="Arial"/>
                   </a:defRPr>
@@ -800,7 +801,7 @@
           </c:tx>
           <c:spPr>
             <a:solidFill>
-              <a:srgbClr val="F96167"/>
+              <a:srgbClr val="4A3184"/>
             </a:solidFill>
             <a:effectLst/>
           </c:spPr>
@@ -814,7 +815,7 @@
                 <a:pPr>
                   <a:defRPr b="0" i="0" strike="noStrike" sz="1100" u="none">
                     <a:solidFill>
-                      <a:srgbClr val="36454F"/>
+                      <a:srgbClr val="32373C"/>
                     </a:solidFill>
                     <a:latin typeface="Arial"/>
                   </a:defRPr>
@@ -876,7 +877,7 @@
               <a:pPr>
                 <a:defRPr b="0" i="0" strike="noStrike" sz="1100" u="none">
                   <a:solidFill>
-                    <a:srgbClr val="36454F"/>
+                    <a:srgbClr val="32373C"/>
                   </a:solidFill>
                   <a:latin typeface="Arial"/>
                 </a:defRPr>
@@ -924,7 +925,7 @@
             <a:pPr>
               <a:defRPr sz="1200" b="0" i="0" u="none" strike="noStrike">
                 <a:solidFill>
-                  <a:srgbClr val="36454F"/>
+                  <a:srgbClr val="32373C"/>
                 </a:solidFill>
                 <a:latin typeface="Arial"/>
               </a:defRPr>
@@ -979,7 +980,7 @@
       </c:valAx>
       <c:spPr>
         <a:solidFill>
-          <a:srgbClr val="F7F8FC"/>
+          <a:srgbClr val="F5F3FA"/>
         </a:solidFill>
         <a:ln>
           <a:noFill/>
@@ -997,7 +998,7 @@
           <a:pPr>
             <a:defRPr sz="1100">
               <a:solidFill>
-                <a:srgbClr val="36454F"/>
+                <a:srgbClr val="32373C"/>
               </a:solidFill>
             </a:defRPr>
           </a:pPr>
@@ -1035,7 +1036,7 @@
             <a:pPr>
               <a:defRPr sz="1300" b="0" i="0" u="none" strike="noStrike">
                 <a:solidFill>
-                  <a:srgbClr val="36454F"/>
+                  <a:srgbClr val="32373C"/>
                 </a:solidFill>
                 <a:latin typeface="Calibri"/>
               </a:defRPr>
@@ -1043,7 +1044,587 @@
             <a:r>
               <a:rPr sz="1300" b="0" i="0" u="none" strike="noStrike">
                 <a:solidFill>
-                  <a:srgbClr val="36454F"/>
+                  <a:srgbClr val="32373C"/>
+                </a:solidFill>
+                <a:latin typeface="Calibri"/>
+              </a:rPr>
+              <a:t>Tono por pregunta (n=64 cada una)</a:t>
+            </a:r>
+          </a:p>
+        </c:rich>
+      </c:tx>
+      <c:layout/>
+      <c:overlay val="0"/>
+    </c:title>
+    <c:autoTitleDeleted val="0"/>
+    <c:plotArea>
+      <c:layout/>
+      <c:barChart>
+        <c:barDir val="bar"/>
+        <c:grouping val="stacked"/>
+        <c:varyColors val="0"/>
+        <c:ser>
+          <c:idx val="0"/>
+          <c:order val="0"/>
+          <c:tx>
+            <c:strRef>
+              <c:f>Sheet1!$B$1</c:f>
+              <c:strCache>
+                <c:ptCount val="1"/>
+                <c:pt idx="0">
+                  <c:v>Positivo</c:v>
+                </c:pt>
+              </c:strCache>
+            </c:strRef>
+          </c:tx>
+          <c:spPr>
+            <a:solidFill>
+              <a:srgbClr val="44C5E3"/>
+            </a:solidFill>
+            <a:effectLst/>
+          </c:spPr>
+          <c:invertIfNegative val="0"/>
+          <c:dLbls>
+            <c:numFmt formatCode="#,##0" sourceLinked="0"/>
+            <c:txPr>
+              <a:bodyPr/>
+              <a:lstStyle/>
+              <a:p>
+                <a:pPr>
+                  <a:defRPr b="0" i="0" strike="noStrike" sz="1000" u="none">
+                    <a:solidFill>
+                      <a:srgbClr val="FFFFFF"/>
+                    </a:solidFill>
+                    <a:latin typeface="Arial"/>
+                  </a:defRPr>
+                </a:pPr>
+              </a:p>
+            </c:txPr>
+            <c:dLblPos val="ctr"/>
+            <c:showLegendKey val="0"/>
+            <c:showVal val="1"/>
+            <c:showCatName val="0"/>
+            <c:showSerName val="0"/>
+            <c:showPercent val="0"/>
+            <c:showBubbleSize val="0"/>
+            <c:showLeaderLines val="0"/>
+          </c:dLbls>
+          <c:cat>
+            <c:multiLvlStrRef>
+              <c:f>Sheet1!$A$2:$A$6</c:f>
+              <c:multiLvlStrCache>
+                <c:ptCount val="5"/>
+                <c:lvl>
+                  <c:pt idx="0">
+                    <c:v>P1 · Motivo</c:v>
+                  </c:pt>
+                  <c:pt idx="1">
+                    <c:v>P2 · Área de mejora</c:v>
+                  </c:pt>
+                  <c:pt idx="2">
+                    <c:v>P2 · Fortaleza</c:v>
+                  </c:pt>
+                  <c:pt idx="3">
+                    <c:v>P3 · Competencia</c:v>
+                  </c:pt>
+                  <c:pt idx="4">
+                    <c:v>P4 · Exclusividad</c:v>
+                  </c:pt>
+                </c:lvl>
+              </c:multiLvlStrCache>
+            </c:multiLvlStrRef>
+          </c:cat>
+          <c:val>
+            <c:numRef>
+              <c:f>Sheet1!$B$2:$B$6</c:f>
+              <c:numCache>
+                <c:formatCode>General</c:formatCode>
+                <c:ptCount val="5"/>
+                <c:pt idx="0">
+                  <c:v>7</c:v>
+                </c:pt>
+                <c:pt idx="1">
+                  <c:v>3</c:v>
+                </c:pt>
+                <c:pt idx="2">
+                  <c:v>29</c:v>
+                </c:pt>
+                <c:pt idx="3">
+                  <c:v>34</c:v>
+                </c:pt>
+                <c:pt idx="4">
+                  <c:v>14</c:v>
+                </c:pt>
+              </c:numCache>
+            </c:numRef>
+          </c:val>
+        </c:ser>
+        <c:ser>
+          <c:idx val="1"/>
+          <c:order val="1"/>
+          <c:tx>
+            <c:strRef>
+              <c:f>Sheet1!$C$1</c:f>
+              <c:strCache>
+                <c:ptCount val="1"/>
+                <c:pt idx="0">
+                  <c:v>Neutro</c:v>
+                </c:pt>
+              </c:strCache>
+            </c:strRef>
+          </c:tx>
+          <c:spPr>
+            <a:solidFill>
+              <a:srgbClr val="C9BEDD"/>
+            </a:solidFill>
+            <a:effectLst/>
+          </c:spPr>
+          <c:invertIfNegative val="0"/>
+          <c:dLbls>
+            <c:numFmt formatCode="#,##0" sourceLinked="0"/>
+            <c:txPr>
+              <a:bodyPr/>
+              <a:lstStyle/>
+              <a:p>
+                <a:pPr>
+                  <a:defRPr b="0" i="0" strike="noStrike" sz="1000" u="none">
+                    <a:solidFill>
+                      <a:srgbClr val="FFFFFF"/>
+                    </a:solidFill>
+                    <a:latin typeface="Arial"/>
+                  </a:defRPr>
+                </a:pPr>
+              </a:p>
+            </c:txPr>
+            <c:dLblPos val="ctr"/>
+            <c:showLegendKey val="0"/>
+            <c:showVal val="1"/>
+            <c:showCatName val="0"/>
+            <c:showSerName val="0"/>
+            <c:showPercent val="0"/>
+            <c:showBubbleSize val="0"/>
+            <c:showLeaderLines val="0"/>
+          </c:dLbls>
+          <c:cat>
+            <c:multiLvlStrRef>
+              <c:f>Sheet1!$A$2:$A$6</c:f>
+              <c:multiLvlStrCache>
+                <c:ptCount val="5"/>
+                <c:lvl>
+                  <c:pt idx="0">
+                    <c:v>P1 · Motivo</c:v>
+                  </c:pt>
+                  <c:pt idx="1">
+                    <c:v>P2 · Área de mejora</c:v>
+                  </c:pt>
+                  <c:pt idx="2">
+                    <c:v>P2 · Fortaleza</c:v>
+                  </c:pt>
+                  <c:pt idx="3">
+                    <c:v>P3 · Competencia</c:v>
+                  </c:pt>
+                  <c:pt idx="4">
+                    <c:v>P4 · Exclusividad</c:v>
+                  </c:pt>
+                </c:lvl>
+              </c:multiLvlStrCache>
+            </c:multiLvlStrRef>
+          </c:cat>
+          <c:val>
+            <c:numRef>
+              <c:f>Sheet1!$C$2:$C$6</c:f>
+              <c:numCache>
+                <c:formatCode>General</c:formatCode>
+                <c:ptCount val="5"/>
+                <c:pt idx="0">
+                  <c:v>33</c:v>
+                </c:pt>
+                <c:pt idx="1">
+                  <c:v>9</c:v>
+                </c:pt>
+                <c:pt idx="2">
+                  <c:v>15</c:v>
+                </c:pt>
+                <c:pt idx="3">
+                  <c:v>19</c:v>
+                </c:pt>
+                <c:pt idx="4">
+                  <c:v>32</c:v>
+                </c:pt>
+              </c:numCache>
+            </c:numRef>
+          </c:val>
+        </c:ser>
+        <c:ser>
+          <c:idx val="2"/>
+          <c:order val="2"/>
+          <c:tx>
+            <c:strRef>
+              <c:f>Sheet1!$D$1</c:f>
+              <c:strCache>
+                <c:ptCount val="1"/>
+                <c:pt idx="0">
+                  <c:v>Negativo</c:v>
+                </c:pt>
+              </c:strCache>
+            </c:strRef>
+          </c:tx>
+          <c:spPr>
+            <a:solidFill>
+              <a:srgbClr val="4A3184"/>
+            </a:solidFill>
+            <a:effectLst/>
+          </c:spPr>
+          <c:invertIfNegative val="0"/>
+          <c:dLbls>
+            <c:numFmt formatCode="#,##0" sourceLinked="0"/>
+            <c:txPr>
+              <a:bodyPr/>
+              <a:lstStyle/>
+              <a:p>
+                <a:pPr>
+                  <a:defRPr b="0" i="0" strike="noStrike" sz="1000" u="none">
+                    <a:solidFill>
+                      <a:srgbClr val="FFFFFF"/>
+                    </a:solidFill>
+                    <a:latin typeface="Arial"/>
+                  </a:defRPr>
+                </a:pPr>
+              </a:p>
+            </c:txPr>
+            <c:dLblPos val="ctr"/>
+            <c:showLegendKey val="0"/>
+            <c:showVal val="1"/>
+            <c:showCatName val="0"/>
+            <c:showSerName val="0"/>
+            <c:showPercent val="0"/>
+            <c:showBubbleSize val="0"/>
+            <c:showLeaderLines val="0"/>
+          </c:dLbls>
+          <c:cat>
+            <c:multiLvlStrRef>
+              <c:f>Sheet1!$A$2:$A$6</c:f>
+              <c:multiLvlStrCache>
+                <c:ptCount val="5"/>
+                <c:lvl>
+                  <c:pt idx="0">
+                    <c:v>P1 · Motivo</c:v>
+                  </c:pt>
+                  <c:pt idx="1">
+                    <c:v>P2 · Área de mejora</c:v>
+                  </c:pt>
+                  <c:pt idx="2">
+                    <c:v>P2 · Fortaleza</c:v>
+                  </c:pt>
+                  <c:pt idx="3">
+                    <c:v>P3 · Competencia</c:v>
+                  </c:pt>
+                  <c:pt idx="4">
+                    <c:v>P4 · Exclusividad</c:v>
+                  </c:pt>
+                </c:lvl>
+              </c:multiLvlStrCache>
+            </c:multiLvlStrRef>
+          </c:cat>
+          <c:val>
+            <c:numRef>
+              <c:f>Sheet1!$D$2:$D$6</c:f>
+              <c:numCache>
+                <c:formatCode>General</c:formatCode>
+                <c:ptCount val="5"/>
+                <c:pt idx="0">
+                  <c:v>23</c:v>
+                </c:pt>
+                <c:pt idx="1">
+                  <c:v>5</c:v>
+                </c:pt>
+                <c:pt idx="2">
+                  <c:v>1</c:v>
+                </c:pt>
+                <c:pt idx="3">
+                  <c:v>0</c:v>
+                </c:pt>
+                <c:pt idx="4">
+                  <c:v>9</c:v>
+                </c:pt>
+              </c:numCache>
+            </c:numRef>
+          </c:val>
+        </c:ser>
+        <c:ser>
+          <c:idx val="3"/>
+          <c:order val="3"/>
+          <c:tx>
+            <c:strRef>
+              <c:f>Sheet1!$E$1</c:f>
+              <c:strCache>
+                <c:ptCount val="1"/>
+                <c:pt idx="0">
+                  <c:v>Sin respuesta</c:v>
+                </c:pt>
+              </c:strCache>
+            </c:strRef>
+          </c:tx>
+          <c:spPr>
+            <a:solidFill>
+              <a:srgbClr val="D2D2D2"/>
+            </a:solidFill>
+            <a:effectLst/>
+          </c:spPr>
+          <c:invertIfNegative val="0"/>
+          <c:dLbls>
+            <c:numFmt formatCode="#,##0" sourceLinked="0"/>
+            <c:txPr>
+              <a:bodyPr/>
+              <a:lstStyle/>
+              <a:p>
+                <a:pPr>
+                  <a:defRPr b="0" i="0" strike="noStrike" sz="1000" u="none">
+                    <a:solidFill>
+                      <a:srgbClr val="FFFFFF"/>
+                    </a:solidFill>
+                    <a:latin typeface="Arial"/>
+                  </a:defRPr>
+                </a:pPr>
+              </a:p>
+            </c:txPr>
+            <c:dLblPos val="ctr"/>
+            <c:showLegendKey val="0"/>
+            <c:showVal val="1"/>
+            <c:showCatName val="0"/>
+            <c:showSerName val="0"/>
+            <c:showPercent val="0"/>
+            <c:showBubbleSize val="0"/>
+            <c:showLeaderLines val="0"/>
+          </c:dLbls>
+          <c:cat>
+            <c:multiLvlStrRef>
+              <c:f>Sheet1!$A$2:$A$6</c:f>
+              <c:multiLvlStrCache>
+                <c:ptCount val="5"/>
+                <c:lvl>
+                  <c:pt idx="0">
+                    <c:v>P1 · Motivo</c:v>
+                  </c:pt>
+                  <c:pt idx="1">
+                    <c:v>P2 · Área de mejora</c:v>
+                  </c:pt>
+                  <c:pt idx="2">
+                    <c:v>P2 · Fortaleza</c:v>
+                  </c:pt>
+                  <c:pt idx="3">
+                    <c:v>P3 · Competencia</c:v>
+                  </c:pt>
+                  <c:pt idx="4">
+                    <c:v>P4 · Exclusividad</c:v>
+                  </c:pt>
+                </c:lvl>
+              </c:multiLvlStrCache>
+            </c:multiLvlStrRef>
+          </c:cat>
+          <c:val>
+            <c:numRef>
+              <c:f>Sheet1!$E$2:$E$6</c:f>
+              <c:numCache>
+                <c:formatCode>General</c:formatCode>
+                <c:ptCount val="5"/>
+                <c:pt idx="0">
+                  <c:v>1</c:v>
+                </c:pt>
+                <c:pt idx="1">
+                  <c:v>47</c:v>
+                </c:pt>
+                <c:pt idx="2">
+                  <c:v>19</c:v>
+                </c:pt>
+                <c:pt idx="3">
+                  <c:v>11</c:v>
+                </c:pt>
+                <c:pt idx="4">
+                  <c:v>9</c:v>
+                </c:pt>
+              </c:numCache>
+            </c:numRef>
+          </c:val>
+        </c:ser>
+        <c:dLbls>
+          <c:numFmt formatCode="#,##0" sourceLinked="0"/>
+          <c:txPr>
+            <a:bodyPr/>
+            <a:lstStyle/>
+            <a:p>
+              <a:pPr>
+                <a:defRPr b="0" i="0" strike="noStrike" sz="1000" u="none">
+                  <a:solidFill>
+                    <a:srgbClr val="FFFFFF"/>
+                  </a:solidFill>
+                  <a:latin typeface="Arial"/>
+                </a:defRPr>
+              </a:pPr>
+            </a:p>
+          </c:txPr>
+          <c:dLblPos val="ctr"/>
+          <c:showLegendKey val="0"/>
+          <c:showVal val="1"/>
+          <c:showCatName val="0"/>
+          <c:showSerName val="0"/>
+          <c:showPercent val="0"/>
+          <c:showBubbleSize val="0"/>
+          <c:showLeaderLines val="0"/>
+        </c:dLbls>
+        <c:gapWidth val="50"/>
+        <c:overlap val="100"/>
+        <c:axId val="2094734554"/>
+        <c:axId val="2094734552"/>
+        <c:axId val="2094734556"/>
+      </c:barChart>
+      <c:catAx>
+        <c:axId val="2094734554"/>
+        <c:scaling>
+          <c:orientation val="minMax"/>
+        </c:scaling>
+        <c:delete val="0"/>
+        <c:axPos val="l"/>
+        <c:numFmt formatCode="General" sourceLinked="1"/>
+        <c:majorTickMark val="out"/>
+        <c:minorTickMark val="none"/>
+        <c:tickLblPos val="nextTo"/>
+        <c:spPr>
+          <a:ln w="12700" cap="flat">
+            <a:solidFill>
+              <a:srgbClr val="888888"/>
+            </a:solidFill>
+            <a:prstDash val="solid"/>
+            <a:round/>
+          </a:ln>
+        </c:spPr>
+        <c:txPr>
+          <a:bodyPr/>
+          <a:lstStyle/>
+          <a:p>
+            <a:pPr>
+              <a:defRPr sz="1150" b="0" i="0" u="none" strike="noStrike">
+                <a:solidFill>
+                  <a:srgbClr val="32373C"/>
+                </a:solidFill>
+                <a:latin typeface="Arial"/>
+              </a:defRPr>
+            </a:pPr>
+            <a:endParaRPr lang="en-US"/>
+          </a:p>
+        </c:txPr>
+        <c:crossAx val="2094734552"/>
+        <c:crosses val="autoZero"/>
+        <c:auto val="1"/>
+        <c:lblAlgn val="ctr"/>
+        <c:noMultiLvlLbl val="1"/>
+      </c:catAx>
+      <c:valAx>
+        <c:axId val="2094734552"/>
+        <c:scaling>
+          <c:orientation val="minMax"/>
+        </c:scaling>
+        <c:delete val="1"/>
+        <c:axPos val="b"/>
+        <c:numFmt formatCode="General" sourceLinked="0"/>
+        <c:majorTickMark val="out"/>
+        <c:minorTickMark val="none"/>
+        <c:tickLblPos val="low"/>
+        <c:spPr>
+          <a:ln w="12700" cap="flat">
+            <a:solidFill>
+              <a:srgbClr val="888888"/>
+            </a:solidFill>
+            <a:prstDash val="solid"/>
+            <a:round/>
+          </a:ln>
+        </c:spPr>
+        <c:txPr>
+          <a:bodyPr/>
+          <a:lstStyle/>
+          <a:p>
+            <a:pPr>
+              <a:defRPr sz="1200" b="0" i="0" u="none" strike="noStrike">
+                <a:solidFill>
+                  <a:srgbClr val="000000"/>
+                </a:solidFill>
+                <a:latin typeface="Arial"/>
+              </a:defRPr>
+            </a:pPr>
+            <a:endParaRPr lang="en-US"/>
+          </a:p>
+        </c:txPr>
+        <c:crossAx val="2094734554"/>
+        <c:crosses val="autoZero"/>
+        <c:crossBetween val="between"/>
+      </c:valAx>
+      <c:spPr>
+        <a:solidFill>
+          <a:srgbClr val="F5F3FA"/>
+        </a:solidFill>
+        <a:ln>
+          <a:noFill/>
+        </a:ln>
+        <a:effectLst/>
+      </c:spPr>
+    </c:plotArea>
+    <c:legend>
+      <c:legendPos val="b"/>
+      <c:overlay val="0"/>
+      <c:txPr>
+        <a:bodyPr/>
+        <a:lstStyle/>
+        <a:p>
+          <a:pPr>
+            <a:defRPr sz="1050">
+              <a:solidFill>
+                <a:srgbClr val="32373C"/>
+              </a:solidFill>
+            </a:defRPr>
+          </a:pPr>
+          <a:endParaRPr lang="en-US"/>
+        </a:p>
+      </c:txPr>
+    </c:legend>
+    <c:plotVisOnly val="1"/>
+    <c:dispBlanksAs val="span"/>
+  </c:chart>
+  <c:spPr>
+    <a:noFill/>
+    <a:ln>
+      <a:noFill/>
+    </a:ln>
+    <a:effectLst/>
+  </c:spPr>
+  <c:externalData r:id="rId1">
+    <c:autoUpdate val="0"/>
+  </c:externalData>
+</c:chartSpace>
+</file>
+
+<file path=ppt/charts/chart5.xml><?xml version="1.0" encoding="utf-8"?>
+<c:chartSpace xmlns:c="http://schemas.openxmlformats.org/drawingml/2006/chart" xmlns:a="http://schemas.openxmlformats.org/drawingml/2006/main" xmlns:r="http://schemas.openxmlformats.org/officeDocument/2006/relationships">
+  <c:date1904 val="0"/>
+  <c:roundedCorners val="1"/>
+  <c:chart>
+    <c:title>
+      <c:tx>
+        <c:rich>
+          <a:bodyPr/>
+          <a:lstStyle/>
+          <a:p>
+            <a:pPr>
+              <a:defRPr sz="1300" b="0" i="0" u="none" strike="noStrike">
+                <a:solidFill>
+                  <a:srgbClr val="32373C"/>
+                </a:solidFill>
+                <a:latin typeface="Calibri"/>
+              </a:defRPr>
+            </a:pPr>
+            <a:r>
+              <a:rPr sz="1300" b="0" i="0" u="none" strike="noStrike">
+                <a:solidFill>
+                  <a:srgbClr val="32373C"/>
                 </a:solidFill>
                 <a:latin typeface="Calibri"/>
               </a:rPr>
@@ -1078,7 +1659,7 @@
           </c:tx>
           <c:spPr>
             <a:solidFill>
-              <a:srgbClr val="F96167"/>
+              <a:srgbClr val="44C5E3"/>
             </a:solidFill>
             <a:effectLst/>
           </c:spPr>
@@ -1092,7 +1673,7 @@
                 <a:pPr>
                   <a:defRPr b="0" i="0" strike="noStrike" sz="1200" u="none">
                     <a:solidFill>
-                      <a:srgbClr val="36454F"/>
+                      <a:srgbClr val="32373C"/>
                     </a:solidFill>
                     <a:latin typeface="Arial"/>
                   </a:defRPr>
@@ -1113,7 +1694,7 @@
             <c:bubble3D val="0"/>
             <c:spPr>
               <a:solidFill>
-                <a:srgbClr val="F96167"/>
+                <a:srgbClr val="44C5E3"/>
               </a:solidFill>
               <a:effectLst/>
             </c:spPr>
@@ -1124,7 +1705,7 @@
             <c:bubble3D val="0"/>
             <c:spPr>
               <a:solidFill>
-                <a:srgbClr val="CADCFC"/>
+                <a:srgbClr val="C9BEDD"/>
               </a:solidFill>
               <a:effectLst/>
             </c:spPr>
@@ -1135,7 +1716,7 @@
             <c:bubble3D val="0"/>
             <c:spPr>
               <a:solidFill>
-                <a:srgbClr val="CADCFC"/>
+                <a:srgbClr val="C9BEDD"/>
               </a:solidFill>
               <a:effectLst/>
             </c:spPr>
@@ -1146,7 +1727,7 @@
             <c:bubble3D val="0"/>
             <c:spPr>
               <a:solidFill>
-                <a:srgbClr val="CADCFC"/>
+                <a:srgbClr val="C9BEDD"/>
               </a:solidFill>
               <a:effectLst/>
             </c:spPr>
@@ -1157,7 +1738,7 @@
             <c:bubble3D val="0"/>
             <c:spPr>
               <a:solidFill>
-                <a:srgbClr val="CADCFC"/>
+                <a:srgbClr val="C9BEDD"/>
               </a:solidFill>
               <a:effectLst/>
             </c:spPr>
@@ -1221,7 +1802,7 @@
               <a:pPr>
                 <a:defRPr b="0" i="0" strike="noStrike" sz="1200" u="none">
                   <a:solidFill>
-                    <a:srgbClr val="36454F"/>
+                    <a:srgbClr val="32373C"/>
                   </a:solidFill>
                   <a:latin typeface="Arial"/>
                 </a:defRPr>
@@ -1269,7 +1850,7 @@
             <a:pPr>
               <a:defRPr sz="1200" b="0" i="0" u="none" strike="noStrike">
                 <a:solidFill>
-                  <a:srgbClr val="36454F"/>
+                  <a:srgbClr val="32373C"/>
                 </a:solidFill>
                 <a:latin typeface="Arial"/>
               </a:defRPr>
@@ -1324,7 +1905,7 @@
       </c:valAx>
       <c:spPr>
         <a:solidFill>
-          <a:srgbClr val="F7F8FC"/>
+          <a:srgbClr val="F5F3FA"/>
         </a:solidFill>
         <a:ln>
           <a:noFill/>
@@ -2383,6 +2964,94 @@
             <a:fld id="{F7021451-1387-4CA6-816F-3879F97B5CBC}" type="slidenum">
               <a:rPr lang="en-US"/>
               <a:t>8</a:t>
+            </a:fld>
+            <a:endParaRPr lang="en-US"/>
+          </a:p>
+        </p:txBody>
+      </p:sp>
+    </p:spTree>
+    <p:extLst>
+      <p:ext uri="{BB962C8B-B14F-4D97-AF65-F5344CB8AC3E}">
+        <p14:creationId xmlns:p14="http://schemas.microsoft.com/office/powerpoint/2010/main" val="1024086991"/>
+      </p:ext>
+    </p:extLst>
+  </p:cSld>
+  <p:clrMapOvr>
+    <a:masterClrMapping/>
+  </p:clrMapOvr>
+</p:notes>
+</file>
+
+<file path=ppt/notesSlides/notesSlide9.xml><?xml version="1.0" encoding="utf-8"?>
+<p:notes xmlns:a="http://schemas.openxmlformats.org/drawingml/2006/main" xmlns:r="http://schemas.openxmlformats.org/officeDocument/2006/relationships" xmlns:p="http://schemas.openxmlformats.org/presentationml/2006/main">
+  <p:cSld>
+    <p:spTree>
+      <p:nvGrpSpPr>
+        <p:cNvPr id="1" name=""/>
+        <p:cNvGrpSpPr/>
+        <p:nvPr/>
+      </p:nvGrpSpPr>
+      <p:grpSpPr>
+        <a:xfrm>
+          <a:off x="0" y="0"/>
+          <a:ext cx="0" cy="0"/>
+          <a:chOff x="0" y="0"/>
+          <a:chExt cx="0" cy="0"/>
+        </a:xfrm>
+      </p:grpSpPr>
+      <p:sp>
+        <p:nvSpPr>
+          <p:cNvPr id="2" name="Slide Image Placeholder 1"/>
+          <p:cNvSpPr>
+            <a:spLocks noGrp="1" noRot="1" noChangeAspect="1"/>
+          </p:cNvSpPr>
+          <p:nvPr>
+            <p:ph type="sldImg"/>
+          </p:nvPr>
+        </p:nvSpPr>
+        <p:spPr/>
+      </p:sp>
+      <p:sp>
+        <p:nvSpPr>
+          <p:cNvPr id="3" name="Notes Placeholder 2"/>
+          <p:cNvSpPr>
+            <a:spLocks noGrp="1"/>
+          </p:cNvSpPr>
+          <p:nvPr>
+            <p:ph type="body" idx="1"/>
+          </p:nvPr>
+        </p:nvSpPr>
+        <p:spPr/>
+        <p:txBody>
+          <a:bodyPr/>
+          <a:lstStyle/>
+          <a:p>
+            <a:r>
+              <a:rPr lang="en-US" dirty="0"/>
+              <a:t/>
+            </a:r>
+            <a:endParaRPr lang="en-US" dirty="0"/>
+          </a:p>
+        </p:txBody>
+      </p:sp>
+      <p:sp>
+        <p:nvSpPr>
+          <p:cNvPr id="4" name="Slide Number Placeholder 3"/>
+          <p:cNvSpPr>
+            <a:spLocks noGrp="1"/>
+          </p:cNvSpPr>
+          <p:nvPr>
+            <p:ph type="sldNum" sz="quarter" idx="10"/>
+          </p:nvPr>
+        </p:nvSpPr>
+        <p:spPr/>
+        <p:txBody>
+          <a:bodyPr/>
+          <a:lstStyle/>
+          <a:p>
+            <a:fld id="{F7021451-1387-4CA6-816F-3879F97B5CBC}" type="slidenum">
+              <a:rPr lang="en-US"/>
+              <a:t>9</a:t>
             </a:fld>
             <a:endParaRPr lang="en-US"/>
           </a:p>
@@ -2714,7 +3383,7 @@
     <p:bg>
       <p:bgPr>
         <a:solidFill>
-          <a:srgbClr val="1E2761"/>
+          <a:srgbClr val="4A3184"/>
         </a:solidFill>
       </p:bgPr>
     </p:bg>
@@ -2740,50 +3409,290 @@
         </p:nvSpPr>
         <p:spPr>
           <a:xfrm>
-            <a:off x="8503920" y="-2011680"/>
-            <a:ext cx="5943600" cy="5943600"/>
-          </a:xfrm>
-          <a:prstGeom prst="ellipse">
+            <a:off x="0" y="0"/>
+            <a:ext cx="12188952" cy="6858000"/>
+          </a:xfrm>
+          <a:prstGeom prst="rect">
             <a:avLst/>
           </a:prstGeom>
           <a:solidFill>
-            <a:srgbClr val="273585"/>
+            <a:srgbClr val="4A3184"/>
           </a:solidFill>
           <a:ln/>
         </p:spPr>
       </p:sp>
-      <p:sp>
-        <p:nvSpPr>
-          <p:cNvPr id="3" name="Shape 1"/>
+      <p:pic>
+        <p:nvPicPr>
+          <p:cNvPr id="3" name="Image 0" descr="plane_icon_white.png">    </p:cNvPr>
+          <p:cNvPicPr>
+            <a:picLocks noChangeAspect="1"/>
+          </p:cNvPicPr>
+          <p:nvPr/>
+        </p:nvPicPr>
+        <p:blipFill>
+          <a:blip r:embed="rId1">
+            <a:alphaModFix amt="18000"/>
+          </a:blip>
+          <a:stretch>
+            <a:fillRect/>
+          </a:stretch>
+        </p:blipFill>
+        <p:spPr>
+          <a:xfrm rot="480000">
+            <a:off x="-1005840" y="4206240"/>
+            <a:ext cx="4754880" cy="4315968"/>
+          </a:xfrm>
+          <a:prstGeom prst="rect">
+            <a:avLst/>
+          </a:prstGeom>
+        </p:spPr>
+      </p:pic>
+      <p:pic>
+        <p:nvPicPr>
+          <p:cNvPr id="4" name="Image 1" descr="logocrece.png">    </p:cNvPr>
+          <p:cNvPicPr>
+            <a:picLocks noChangeAspect="1"/>
+          </p:cNvPicPr>
+          <p:nvPr/>
+        </p:nvPicPr>
+        <p:blipFill>
+          <a:blip r:embed="rId2"/>
+          <a:stretch>
+            <a:fillRect/>
+          </a:stretch>
+        </p:blipFill>
+        <p:spPr>
+          <a:xfrm>
+            <a:off x="548640" y="502920"/>
+            <a:ext cx="2286000" cy="641909"/>
+          </a:xfrm>
+          <a:prstGeom prst="rect">
+            <a:avLst/>
+          </a:prstGeom>
+        </p:spPr>
+      </p:pic>
+      <p:sp>
+        <p:nvSpPr>
+          <p:cNvPr id="5" name="Text 1"/>
+          <p:cNvSpPr txBox="1"/>
+          <p:nvPr/>
+        </p:nvSpPr>
+        <p:spPr>
+          <a:xfrm>
+            <a:off x="548640" y="1874520"/>
+            <a:ext cx="8229600" cy="365760"/>
+          </a:xfrm>
+          <a:prstGeom prst="rect">
+            <a:avLst/>
+          </a:prstGeom>
+          <a:noFill/>
+          <a:ln/>
+        </p:spPr>
+        <p:txBody>
+          <a:bodyPr wrap="square" lIns="0" tIns="0" rIns="0" bIns="0" rtlCol="0" anchor="ctr"/>
+          <a:lstStyle/>
+          <a:p>
+            <a:pPr indent="0" marL="0">
+              <a:buNone/>
+            </a:pPr>
+            <a:r>
+              <a:rPr lang="en-US" sz="1400" b="1" spc="200" kern="0" dirty="0">
+                <a:solidFill>
+                  <a:srgbClr val="44C5E3"/>
+                </a:solidFill>
+                <a:latin typeface="Calibri" pitchFamily="34" charset="0"/>
+                <a:ea typeface="Calibri" pitchFamily="34" charset="-122"/>
+                <a:cs typeface="Calibri" pitchFamily="34" charset="-120"/>
+              </a:rPr>
+              <a:t>ENCUESTA DE EXPERIENCIA COMERCIAL</a:t>
+            </a:r>
+            <a:endParaRPr lang="en-US" sz="1400" dirty="0"/>
+          </a:p>
+        </p:txBody>
+      </p:sp>
+      <p:sp>
+        <p:nvSpPr>
+          <p:cNvPr id="6" name="Text 2"/>
+          <p:cNvSpPr txBox="1"/>
+          <p:nvPr/>
+        </p:nvSpPr>
+        <p:spPr>
+          <a:xfrm>
+            <a:off x="548640" y="2286000"/>
+            <a:ext cx="6035040" cy="1188720"/>
+          </a:xfrm>
+          <a:prstGeom prst="rect">
+            <a:avLst/>
+          </a:prstGeom>
+          <a:noFill/>
+          <a:ln/>
+        </p:spPr>
+        <p:txBody>
+          <a:bodyPr wrap="square" lIns="0" tIns="0" rIns="0" bIns="0" rtlCol="0" anchor="ctr"/>
+          <a:lstStyle/>
+          <a:p>
+            <a:pPr indent="0" marL="0">
+              <a:buNone/>
+            </a:pPr>
+            <a:r>
+              <a:rPr lang="en-US" sz="4200" b="1" dirty="0">
+                <a:solidFill>
+                  <a:srgbClr val="FFFFFF"/>
+                </a:solidFill>
+                <a:latin typeface="Calibri" pitchFamily="34" charset="0"/>
+                <a:ea typeface="Calibri" pitchFamily="34" charset="-122"/>
+                <a:cs typeface="Calibri" pitchFamily="34" charset="-120"/>
+              </a:rPr>
+              <a:t>La voz de las distribuidoras</a:t>
+            </a:r>
+            <a:endParaRPr lang="en-US" sz="4200" dirty="0"/>
+          </a:p>
+        </p:txBody>
+      </p:sp>
+      <p:sp>
+        <p:nvSpPr>
+          <p:cNvPr id="7" name="Text 3"/>
+          <p:cNvSpPr txBox="1"/>
+          <p:nvPr/>
+        </p:nvSpPr>
+        <p:spPr>
+          <a:xfrm>
+            <a:off x="548640" y="3429000"/>
+            <a:ext cx="5760720" cy="822960"/>
+          </a:xfrm>
+          <a:prstGeom prst="rect">
+            <a:avLst/>
+          </a:prstGeom>
+          <a:noFill/>
+          <a:ln/>
+        </p:spPr>
+        <p:txBody>
+          <a:bodyPr wrap="square" lIns="0" tIns="0" rIns="0" bIns="0" rtlCol="0" anchor="ctr"/>
+          <a:lstStyle/>
+          <a:p>
+            <a:pPr indent="0" marL="0">
+              <a:lnSpc>
+                <a:spcPct val="120000"/>
+              </a:lnSpc>
+              <a:buNone/>
+            </a:pPr>
+            <a:r>
+              <a:rPr lang="en-US" sz="1800" dirty="0">
+                <a:solidFill>
+                  <a:srgbClr val="E4DEF2"/>
+                </a:solidFill>
+                <a:latin typeface="Calibri" pitchFamily="34" charset="0"/>
+                <a:ea typeface="Calibri" pitchFamily="34" charset="-122"/>
+                <a:cs typeface="Calibri" pitchFamily="34" charset="-120"/>
+              </a:rPr>
+              <a:t>5 hallazgos que cambian cómo leemos la satisfacción declarada</a:t>
+            </a:r>
+            <a:endParaRPr lang="en-US" sz="1800" dirty="0"/>
+          </a:p>
+        </p:txBody>
+      </p:sp>
+      <p:sp>
+        <p:nvSpPr>
+          <p:cNvPr id="8" name="Text 4"/>
+          <p:cNvSpPr txBox="1"/>
+          <p:nvPr/>
+        </p:nvSpPr>
+        <p:spPr>
+          <a:xfrm>
+            <a:off x="548640" y="6035040"/>
+            <a:ext cx="6400800" cy="365760"/>
+          </a:xfrm>
+          <a:prstGeom prst="rect">
+            <a:avLst/>
+          </a:prstGeom>
+          <a:noFill/>
+          <a:ln/>
+        </p:spPr>
+        <p:txBody>
+          <a:bodyPr wrap="square" lIns="0" tIns="0" rIns="0" bIns="0" rtlCol="0" anchor="ctr"/>
+          <a:lstStyle/>
+          <a:p>
+            <a:pPr indent="0" marL="0">
+              <a:buNone/>
+            </a:pPr>
+            <a:r>
+              <a:rPr lang="en-US" sz="1300" dirty="0">
+                <a:solidFill>
+                  <a:srgbClr val="9A93B5"/>
+                </a:solidFill>
+                <a:latin typeface="Calibri" pitchFamily="34" charset="0"/>
+                <a:ea typeface="Calibri" pitchFamily="34" charset="-122"/>
+                <a:cs typeface="Calibri" pitchFamily="34" charset="-120"/>
+              </a:rPr>
+              <a:t>64 respuestas efectivas  ·  377 intentos de llamada</a:t>
+            </a:r>
+            <a:endParaRPr lang="en-US" sz="1300" dirty="0"/>
+          </a:p>
+        </p:txBody>
+      </p:sp>
+      <p:sp>
+        <p:nvSpPr>
+          <p:cNvPr id="9" name="Shape 5"/>
           <p:cNvSpPr/>
           <p:nvPr/>
         </p:nvSpPr>
         <p:spPr>
           <a:xfrm>
-            <a:off x="10607040" y="4206240"/>
-            <a:ext cx="2926080" cy="2926080"/>
-          </a:xfrm>
-          <a:prstGeom prst="ellipse">
-            <a:avLst/>
+            <a:off x="7086600" y="1417320"/>
+            <a:ext cx="4572000" cy="3246120"/>
+          </a:xfrm>
+          <a:prstGeom prst="roundRect">
+            <a:avLst>
+              <a:gd name="adj" fmla="val 2817"/>
+            </a:avLst>
           </a:prstGeom>
           <a:solidFill>
-            <a:srgbClr val="F96167">
-              <a:alpha val="22000"/>
-            </a:srgbClr>
+            <a:srgbClr val="FFFFFF"/>
           </a:solidFill>
           <a:ln/>
-        </p:spPr>
-      </p:sp>
-      <p:sp>
-        <p:nvSpPr>
-          <p:cNvPr id="4" name="Text 2"/>
+          <a:effectLst>
+            <a:outerShdw sx="100000" sy="100000" kx="0" ky="0" algn="bl" rotWithShape="0" blurRad="228600" dist="76200" dir="5400000">
+              <a:srgbClr val="1B1233">
+                <a:alpha val="35000"/>
+              </a:srgbClr>
+            </a:outerShdw>
+          </a:effectLst>
+        </p:spPr>
+      </p:sp>
+      <p:pic>
+        <p:nvPicPr>
+          <p:cNvPr id="10" name="Image 2" descr="familia.png">    </p:cNvPr>
+          <p:cNvPicPr>
+            <a:picLocks noChangeAspect="1"/>
+          </p:cNvPicPr>
+          <p:nvPr/>
+        </p:nvPicPr>
+        <p:blipFill>
+          <a:blip r:embed="rId3"/>
+          <a:stretch>
+            <a:fillRect/>
+          </a:stretch>
+        </p:blipFill>
+        <p:spPr>
+          <a:xfrm>
+            <a:off x="7269480" y="1600200"/>
+            <a:ext cx="4206240" cy="2633472"/>
+          </a:xfrm>
+          <a:prstGeom prst="rect">
+            <a:avLst/>
+          </a:prstGeom>
+        </p:spPr>
+      </p:pic>
+      <p:sp>
+        <p:nvSpPr>
+          <p:cNvPr id="11" name="Text 6"/>
           <p:cNvSpPr txBox="1"/>
           <p:nvPr/>
         </p:nvSpPr>
         <p:spPr>
           <a:xfrm>
-            <a:off x="548640" y="1965960"/>
-            <a:ext cx="8229600" cy="365760"/>
+            <a:off x="7269480" y="4279392"/>
+            <a:ext cx="4206240" cy="320040"/>
           </a:xfrm>
           <a:prstGeom prst="rect">
             <a:avLst/>
@@ -2799,134 +3708,17 @@
               <a:buNone/>
             </a:pPr>
             <a:r>
-              <a:rPr lang="en-US" sz="1400" spc="200" kern="0" dirty="0">
-                <a:solidFill>
-                  <a:srgbClr val="CADCFC"/>
-                </a:solidFill>
-                <a:latin typeface="Calibri" pitchFamily="34" charset="0"/>
-                <a:ea typeface="Calibri" pitchFamily="34" charset="-122"/>
-                <a:cs typeface="Calibri" pitchFamily="34" charset="-120"/>
-              </a:rPr>
-              <a:t>ENCUESTA DE EXPERIENCIA COMERCIAL</a:t>
-            </a:r>
-            <a:endParaRPr lang="en-US" sz="1400" dirty="0"/>
-          </a:p>
-        </p:txBody>
-      </p:sp>
-      <p:sp>
-        <p:nvSpPr>
-          <p:cNvPr id="5" name="Text 3"/>
-          <p:cNvSpPr txBox="1"/>
-          <p:nvPr/>
-        </p:nvSpPr>
-        <p:spPr>
-          <a:xfrm>
-            <a:off x="548640" y="2377440"/>
-            <a:ext cx="9601200" cy="1280160"/>
-          </a:xfrm>
-          <a:prstGeom prst="rect">
-            <a:avLst/>
-          </a:prstGeom>
-          <a:noFill/>
-          <a:ln/>
-        </p:spPr>
-        <p:txBody>
-          <a:bodyPr wrap="square" lIns="0" tIns="0" rIns="0" bIns="0" rtlCol="0" anchor="ctr"/>
-          <a:lstStyle/>
-          <a:p>
-            <a:pPr indent="0" marL="0">
-              <a:buNone/>
-            </a:pPr>
-            <a:r>
-              <a:rPr lang="en-US" sz="4400" b="1" dirty="0">
-                <a:solidFill>
-                  <a:srgbClr val="FFFFFF"/>
-                </a:solidFill>
-                <a:latin typeface="Cambria" pitchFamily="34" charset="0"/>
-                <a:ea typeface="Cambria" pitchFamily="34" charset="-122"/>
-                <a:cs typeface="Cambria" pitchFamily="34" charset="-120"/>
-              </a:rPr>
-              <a:t>La voz de las distribuidoras</a:t>
-            </a:r>
-            <a:endParaRPr lang="en-US" sz="4400" dirty="0"/>
-          </a:p>
-        </p:txBody>
-      </p:sp>
-      <p:sp>
-        <p:nvSpPr>
-          <p:cNvPr id="6" name="Text 4"/>
-          <p:cNvSpPr txBox="1"/>
-          <p:nvPr/>
-        </p:nvSpPr>
-        <p:spPr>
-          <a:xfrm>
-            <a:off x="548640" y="3886200"/>
-            <a:ext cx="9144000" cy="548640"/>
-          </a:xfrm>
-          <a:prstGeom prst="rect">
-            <a:avLst/>
-          </a:prstGeom>
-          <a:noFill/>
-          <a:ln/>
-        </p:spPr>
-        <p:txBody>
-          <a:bodyPr wrap="square" lIns="0" tIns="0" rIns="0" bIns="0" rtlCol="0" anchor="ctr"/>
-          <a:lstStyle/>
-          <a:p>
-            <a:pPr indent="0" marL="0">
-              <a:buNone/>
-            </a:pPr>
-            <a:r>
-              <a:rPr lang="en-US" sz="2000" dirty="0">
-                <a:solidFill>
-                  <a:srgbClr val="CADCFC"/>
-                </a:solidFill>
-                <a:latin typeface="Calibri" pitchFamily="34" charset="0"/>
-                <a:ea typeface="Calibri" pitchFamily="34" charset="-122"/>
-                <a:cs typeface="Calibri" pitchFamily="34" charset="-120"/>
-              </a:rPr>
-              <a:t>5 hallazgos que cambian cómo leemos la satisfacción declarada</a:t>
-            </a:r>
-            <a:endParaRPr lang="en-US" sz="2000" dirty="0"/>
-          </a:p>
-        </p:txBody>
-      </p:sp>
-      <p:sp>
-        <p:nvSpPr>
-          <p:cNvPr id="7" name="Text 5"/>
-          <p:cNvSpPr txBox="1"/>
-          <p:nvPr/>
-        </p:nvSpPr>
-        <p:spPr>
-          <a:xfrm>
-            <a:off x="548640" y="6035040"/>
-            <a:ext cx="8229600" cy="365760"/>
-          </a:xfrm>
-          <a:prstGeom prst="rect">
-            <a:avLst/>
-          </a:prstGeom>
-          <a:noFill/>
-          <a:ln/>
-        </p:spPr>
-        <p:txBody>
-          <a:bodyPr wrap="square" lIns="0" tIns="0" rIns="0" bIns="0" rtlCol="0" anchor="ctr"/>
-          <a:lstStyle/>
-          <a:p>
-            <a:pPr indent="0" marL="0">
-              <a:buNone/>
-            </a:pPr>
-            <a:r>
-              <a:rPr lang="en-US" sz="1300" dirty="0">
-                <a:solidFill>
-                  <a:srgbClr val="8892B0"/>
-                </a:solidFill>
-                <a:latin typeface="Calibri" pitchFamily="34" charset="0"/>
-                <a:ea typeface="Calibri" pitchFamily="34" charset="-122"/>
-                <a:cs typeface="Calibri" pitchFamily="34" charset="-120"/>
-              </a:rPr>
-              <a:t>64 respuestas efectivas  ·  377 intentos de llamada  ·  CRECE CON VALES</a:t>
-            </a:r>
-            <a:endParaRPr lang="en-US" sz="1300" dirty="0"/>
+              <a:rPr lang="en-US" sz="1050" i="1" dirty="0">
+                <a:solidFill>
+                  <a:srgbClr val="32373C"/>
+                </a:solidFill>
+                <a:latin typeface="Calibri" pitchFamily="34" charset="0"/>
+                <a:ea typeface="Calibri" pitchFamily="34" charset="-122"/>
+                <a:cs typeface="Calibri" pitchFamily="34" charset="-120"/>
+              </a:rPr>
+              <a:t>Distribuidoras y familias que crecen con la red</a:t>
+            </a:r>
+            <a:endParaRPr lang="en-US" sz="1050" dirty="0"/>
           </a:p>
         </p:txBody>
       </p:sp>
@@ -2971,7 +3763,7 @@
         <p:spPr>
           <a:xfrm>
             <a:off x="548640" y="457200"/>
-            <a:ext cx="10972800" cy="457200"/>
+            <a:ext cx="10972800" cy="411480"/>
           </a:xfrm>
           <a:prstGeom prst="rect">
             <a:avLst/>
@@ -2987,15 +3779,15 @@
               <a:buNone/>
             </a:pPr>
             <a:r>
-              <a:rPr lang="en-US" sz="1400" b="1" spc="100" kern="0" dirty="0">
-                <a:solidFill>
-                  <a:srgbClr val="F96167"/>
-                </a:solidFill>
-                <a:latin typeface="Calibri" pitchFamily="34" charset="0"/>
-                <a:ea typeface="Calibri" pitchFamily="34" charset="-122"/>
-                <a:cs typeface="Calibri" pitchFamily="34" charset="-120"/>
-              </a:rPr>
-              <a:t>01  ·  La satisfacción no significa actividad</a:t>
+              <a:rPr lang="en-US" sz="1400" b="1" spc="150" kern="0" dirty="0">
+                <a:solidFill>
+                  <a:srgbClr val="44C5E3"/>
+                </a:solidFill>
+                <a:latin typeface="Calibri" pitchFamily="34" charset="0"/>
+                <a:ea typeface="Calibri" pitchFamily="34" charset="-122"/>
+                <a:cs typeface="Calibri" pitchFamily="34" charset="-120"/>
+              </a:rPr>
+              <a:t>01  ·  LA SATISFACCIÓN NO SIGNIFICA ACTIVIDAD</a:t>
             </a:r>
             <a:endParaRPr lang="en-US" sz="1400" dirty="0"/>
           </a:p>
@@ -3028,11 +3820,11 @@
             <a:r>
               <a:rPr lang="en-US" sz="3200" b="1" dirty="0">
                 <a:solidFill>
-                  <a:srgbClr val="1E2761"/>
-                </a:solidFill>
-                <a:latin typeface="Cambria" pitchFamily="34" charset="0"/>
-                <a:ea typeface="Cambria" pitchFamily="34" charset="-122"/>
-                <a:cs typeface="Cambria" pitchFamily="34" charset="-120"/>
+                  <a:srgbClr val="4A3184"/>
+                </a:solidFill>
+                <a:latin typeface="Calibri" pitchFamily="34" charset="0"/>
+                <a:ea typeface="Calibri" pitchFamily="34" charset="-122"/>
+                <a:cs typeface="Calibri" pitchFamily="34" charset="-120"/>
               </a:rPr>
               <a:t>Están contentas, pero no están colocando</a:t>
             </a:r>
@@ -3065,17 +3857,17 @@
               <a:buNone/>
             </a:pPr>
             <a:r>
-              <a:rPr lang="en-US" sz="6000" b="1" dirty="0">
-                <a:solidFill>
-                  <a:srgbClr val="F96167"/>
-                </a:solidFill>
-                <a:latin typeface="Cambria" pitchFamily="34" charset="0"/>
-                <a:ea typeface="Cambria" pitchFamily="34" charset="-122"/>
-                <a:cs typeface="Cambria" pitchFamily="34" charset="-120"/>
+              <a:rPr lang="en-US" sz="5800" b="1" dirty="0">
+                <a:solidFill>
+                  <a:srgbClr val="44C5E3"/>
+                </a:solidFill>
+                <a:latin typeface="Calibri" pitchFamily="34" charset="0"/>
+                <a:ea typeface="Calibri" pitchFamily="34" charset="-122"/>
+                <a:cs typeface="Calibri" pitchFamily="34" charset="-120"/>
               </a:rPr>
               <a:t>74.6%</a:t>
             </a:r>
-            <a:endParaRPr lang="en-US" sz="6000" dirty="0"/>
+            <a:endParaRPr lang="en-US" sz="5800" dirty="0"/>
           </a:p>
         </p:txBody>
       </p:sp>
@@ -3109,7 +3901,7 @@
             <a:r>
               <a:rPr lang="en-US" sz="1400" dirty="0">
                 <a:solidFill>
-                  <a:srgbClr val="36454F"/>
+                  <a:srgbClr val="32373C"/>
                 </a:solidFill>
                 <a:latin typeface="Calibri" pitchFamily="34" charset="0"/>
                 <a:ea typeface="Calibri" pitchFamily="34" charset="-122"/>
@@ -3129,7 +3921,7 @@
             <a:r>
               <a:rPr lang="en-US" sz="1400" dirty="0">
                 <a:solidFill>
-                  <a:srgbClr val="36454F"/>
+                  <a:srgbClr val="32373C"/>
                 </a:solidFill>
                 <a:latin typeface="Calibri" pitchFamily="34" charset="0"/>
                 <a:ea typeface="Calibri" pitchFamily="34" charset="-122"/>
@@ -3158,7 +3950,7 @@
           <a:noFill/>
           <a:ln w="12700">
             <a:solidFill>
-              <a:srgbClr val="E2E5F1"/>
+              <a:srgbClr val="E9E6F2"/>
             </a:solidFill>
             <a:prstDash val="solid"/>
           </a:ln>
@@ -3191,11 +3983,11 @@
             <a:r>
               <a:rPr lang="en-US" sz="5000" b="1" dirty="0">
                 <a:solidFill>
-                  <a:srgbClr val="1E2761"/>
-                </a:solidFill>
-                <a:latin typeface="Cambria" pitchFamily="34" charset="0"/>
-                <a:ea typeface="Cambria" pitchFamily="34" charset="-122"/>
-                <a:cs typeface="Cambria" pitchFamily="34" charset="-120"/>
+                  <a:srgbClr val="4A3184"/>
+                </a:solidFill>
+                <a:latin typeface="Calibri" pitchFamily="34" charset="0"/>
+                <a:ea typeface="Calibri" pitchFamily="34" charset="-122"/>
+                <a:cs typeface="Calibri" pitchFamily="34" charset="-120"/>
               </a:rPr>
               <a:t>50%</a:t>
             </a:r>
@@ -3233,7 +4025,7 @@
             <a:r>
               <a:rPr lang="en-US" sz="1400" dirty="0">
                 <a:solidFill>
-                  <a:srgbClr val="36454F"/>
+                  <a:srgbClr val="32373C"/>
                 </a:solidFill>
                 <a:latin typeface="Calibri" pitchFamily="34" charset="0"/>
                 <a:ea typeface="Calibri" pitchFamily="34" charset="-122"/>
@@ -3253,7 +4045,7 @@
             <a:r>
               <a:rPr lang="en-US" sz="1400" dirty="0">
                 <a:solidFill>
-                  <a:srgbClr val="36454F"/>
+                  <a:srgbClr val="32373C"/>
                 </a:solidFill>
                 <a:latin typeface="Calibri" pitchFamily="34" charset="0"/>
                 <a:ea typeface="Calibri" pitchFamily="34" charset="-122"/>
@@ -3308,7 +4100,7 @@
             <a:r>
               <a:rPr lang="en-US" sz="1000" dirty="0">
                 <a:solidFill>
-                  <a:srgbClr val="8892B0"/>
+                  <a:srgbClr val="9A93B5"/>
                 </a:solidFill>
                 <a:latin typeface="Calibri" pitchFamily="34" charset="0"/>
                 <a:ea typeface="Calibri" pitchFamily="34" charset="-122"/>
@@ -3347,7 +4139,7 @@
             <a:r>
               <a:rPr lang="en-US" sz="1000" dirty="0">
                 <a:solidFill>
-                  <a:srgbClr val="8892B0"/>
+                  <a:srgbClr val="9A93B5"/>
                 </a:solidFill>
                 <a:latin typeface="Calibri" pitchFamily="34" charset="0"/>
                 <a:ea typeface="Calibri" pitchFamily="34" charset="-122"/>
@@ -3400,7 +4192,7 @@
         <p:spPr>
           <a:xfrm>
             <a:off x="548640" y="457200"/>
-            <a:ext cx="10972800" cy="457200"/>
+            <a:ext cx="10972800" cy="411480"/>
           </a:xfrm>
           <a:prstGeom prst="rect">
             <a:avLst/>
@@ -3416,15 +4208,15 @@
               <a:buNone/>
             </a:pPr>
             <a:r>
-              <a:rPr lang="en-US" sz="1400" b="1" spc="100" kern="0" dirty="0">
-                <a:solidFill>
-                  <a:srgbClr val="F96167"/>
-                </a:solidFill>
-                <a:latin typeface="Calibri" pitchFamily="34" charset="0"/>
-                <a:ea typeface="Calibri" pitchFamily="34" charset="-122"/>
-                <a:cs typeface="Calibri" pitchFamily="34" charset="-120"/>
-              </a:rPr>
-              <a:t>02  ·  Casi nadie es exclusivo</a:t>
+              <a:rPr lang="en-US" sz="1400" b="1" spc="150" kern="0" dirty="0">
+                <a:solidFill>
+                  <a:srgbClr val="44C5E3"/>
+                </a:solidFill>
+                <a:latin typeface="Calibri" pitchFamily="34" charset="0"/>
+                <a:ea typeface="Calibri" pitchFamily="34" charset="-122"/>
+                <a:cs typeface="Calibri" pitchFamily="34" charset="-120"/>
+              </a:rPr>
+              <a:t>02  ·  CASI NADIE ES EXCLUSIVO</a:t>
             </a:r>
             <a:endParaRPr lang="en-US" sz="1400" dirty="0"/>
           </a:p>
@@ -3457,11 +4249,11 @@
             <a:r>
               <a:rPr lang="en-US" sz="3200" b="1" dirty="0">
                 <a:solidFill>
-                  <a:srgbClr val="1E2761"/>
-                </a:solidFill>
-                <a:latin typeface="Cambria" pitchFamily="34" charset="0"/>
-                <a:ea typeface="Cambria" pitchFamily="34" charset="-122"/>
-                <a:cs typeface="Cambria" pitchFamily="34" charset="-120"/>
+                  <a:srgbClr val="4A3184"/>
+                </a:solidFill>
+                <a:latin typeface="Calibri" pitchFamily="34" charset="0"/>
+                <a:ea typeface="Calibri" pitchFamily="34" charset="-122"/>
+                <a:cs typeface="Calibri" pitchFamily="34" charset="-120"/>
               </a:rPr>
               <a:t>9 de cada 10 ya colocan con otra financiera</a:t>
             </a:r>
@@ -3494,17 +4286,17 @@
               <a:buNone/>
             </a:pPr>
             <a:r>
-              <a:rPr lang="en-US" sz="6000" b="1" dirty="0">
-                <a:solidFill>
-                  <a:srgbClr val="F96167"/>
-                </a:solidFill>
-                <a:latin typeface="Cambria" pitchFamily="34" charset="0"/>
-                <a:ea typeface="Cambria" pitchFamily="34" charset="-122"/>
-                <a:cs typeface="Cambria" pitchFamily="34" charset="-120"/>
+              <a:rPr lang="en-US" sz="5800" b="1" dirty="0">
+                <a:solidFill>
+                  <a:srgbClr val="44C5E3"/>
+                </a:solidFill>
+                <a:latin typeface="Calibri" pitchFamily="34" charset="0"/>
+                <a:ea typeface="Calibri" pitchFamily="34" charset="-122"/>
+                <a:cs typeface="Calibri" pitchFamily="34" charset="-120"/>
               </a:rPr>
               <a:t>90%</a:t>
             </a:r>
-            <a:endParaRPr lang="en-US" sz="6000" dirty="0"/>
+            <a:endParaRPr lang="en-US" sz="5800" dirty="0"/>
           </a:p>
         </p:txBody>
       </p:sp>
@@ -3538,7 +4330,7 @@
             <a:r>
               <a:rPr lang="en-US" sz="1400" dirty="0">
                 <a:solidFill>
-                  <a:srgbClr val="36454F"/>
+                  <a:srgbClr val="32373C"/>
                 </a:solidFill>
                 <a:latin typeface="Calibri" pitchFamily="34" charset="0"/>
                 <a:ea typeface="Calibri" pitchFamily="34" charset="-122"/>
@@ -3558,7 +4350,7 @@
             <a:r>
               <a:rPr lang="en-US" sz="1400" dirty="0">
                 <a:solidFill>
-                  <a:srgbClr val="36454F"/>
+                  <a:srgbClr val="32373C"/>
                 </a:solidFill>
                 <a:latin typeface="Calibri" pitchFamily="34" charset="0"/>
                 <a:ea typeface="Calibri" pitchFamily="34" charset="-122"/>
@@ -3578,7 +4370,7 @@
             <a:r>
               <a:rPr lang="en-US" sz="1400" dirty="0">
                 <a:solidFill>
-                  <a:srgbClr val="36454F"/>
+                  <a:srgbClr val="32373C"/>
                 </a:solidFill>
                 <a:latin typeface="Calibri" pitchFamily="34" charset="0"/>
                 <a:ea typeface="Calibri" pitchFamily="34" charset="-122"/>
@@ -3633,7 +4425,7 @@
             <a:r>
               <a:rPr lang="en-US" sz="1000" dirty="0">
                 <a:solidFill>
-                  <a:srgbClr val="8892B0"/>
+                  <a:srgbClr val="9A93B5"/>
                 </a:solidFill>
                 <a:latin typeface="Calibri" pitchFamily="34" charset="0"/>
                 <a:ea typeface="Calibri" pitchFamily="34" charset="-122"/>
@@ -3672,7 +4464,7 @@
             <a:r>
               <a:rPr lang="en-US" sz="1000" dirty="0">
                 <a:solidFill>
-                  <a:srgbClr val="8892B0"/>
+                  <a:srgbClr val="9A93B5"/>
                 </a:solidFill>
                 <a:latin typeface="Calibri" pitchFamily="34" charset="0"/>
                 <a:ea typeface="Calibri" pitchFamily="34" charset="-122"/>
@@ -3725,7 +4517,7 @@
         <p:spPr>
           <a:xfrm>
             <a:off x="548640" y="457200"/>
-            <a:ext cx="10972800" cy="457200"/>
+            <a:ext cx="10972800" cy="411480"/>
           </a:xfrm>
           <a:prstGeom prst="rect">
             <a:avLst/>
@@ -3741,15 +4533,15 @@
               <a:buNone/>
             </a:pPr>
             <a:r>
-              <a:rPr lang="en-US" sz="1400" b="1" spc="100" kern="0" dirty="0">
-                <a:solidFill>
-                  <a:srgbClr val="F96167"/>
-                </a:solidFill>
-                <a:latin typeface="Calibri" pitchFamily="34" charset="0"/>
-                <a:ea typeface="Calibri" pitchFamily="34" charset="-122"/>
-                <a:cs typeface="Calibri" pitchFamily="34" charset="-120"/>
-              </a:rPr>
-              <a:t>03  ·  La nota no cuenta toda la historia</a:t>
+              <a:rPr lang="en-US" sz="1400" b="1" spc="150" kern="0" dirty="0">
+                <a:solidFill>
+                  <a:srgbClr val="44C5E3"/>
+                </a:solidFill>
+                <a:latin typeface="Calibri" pitchFamily="34" charset="0"/>
+                <a:ea typeface="Calibri" pitchFamily="34" charset="-122"/>
+                <a:cs typeface="Calibri" pitchFamily="34" charset="-120"/>
+              </a:rPr>
+              <a:t>03  ·  LA NOTA NO CUENTA TODA LA HISTORIA</a:t>
             </a:r>
             <a:endParaRPr lang="en-US" sz="1400" dirty="0"/>
           </a:p>
@@ -3780,17 +4572,17 @@
               <a:buNone/>
             </a:pPr>
             <a:r>
-              <a:rPr lang="en-US" sz="2800" b="1" dirty="0">
-                <a:solidFill>
-                  <a:srgbClr val="1E2761"/>
-                </a:solidFill>
-                <a:latin typeface="Cambria" pitchFamily="34" charset="0"/>
-                <a:ea typeface="Cambria" pitchFamily="34" charset="-122"/>
-                <a:cs typeface="Cambria" pitchFamily="34" charset="-120"/>
+              <a:rPr lang="en-US" sz="2700" b="1" dirty="0">
+                <a:solidFill>
+                  <a:srgbClr val="4A3184"/>
+                </a:solidFill>
+                <a:latin typeface="Calibri" pitchFamily="34" charset="0"/>
+                <a:ea typeface="Calibri" pitchFamily="34" charset="-122"/>
+                <a:cs typeface="Calibri" pitchFamily="34" charset="-120"/>
               </a:rPr>
               <a:t>El texto libre destapa una molestia que la calificación esconde</a:t>
             </a:r>
-            <a:endParaRPr lang="en-US" sz="2800" dirty="0"/>
+            <a:endParaRPr lang="en-US" sz="2700" dirty="0"/>
           </a:p>
         </p:txBody>
       </p:sp>
@@ -3819,17 +4611,17 @@
               <a:buNone/>
             </a:pPr>
             <a:r>
-              <a:rPr lang="en-US" sz="6000" b="1" dirty="0">
-                <a:solidFill>
-                  <a:srgbClr val="F96167"/>
-                </a:solidFill>
-                <a:latin typeface="Cambria" pitchFamily="34" charset="0"/>
-                <a:ea typeface="Cambria" pitchFamily="34" charset="-122"/>
-                <a:cs typeface="Cambria" pitchFamily="34" charset="-120"/>
+              <a:rPr lang="en-US" sz="5800" b="1" dirty="0">
+                <a:solidFill>
+                  <a:srgbClr val="44C5E3"/>
+                </a:solidFill>
+                <a:latin typeface="Calibri" pitchFamily="34" charset="0"/>
+                <a:ea typeface="Calibri" pitchFamily="34" charset="-122"/>
+                <a:cs typeface="Calibri" pitchFamily="34" charset="-120"/>
               </a:rPr>
               <a:t>36%</a:t>
             </a:r>
-            <a:endParaRPr lang="en-US" sz="6000" dirty="0"/>
+            <a:endParaRPr lang="en-US" sz="5800" dirty="0"/>
           </a:p>
         </p:txBody>
       </p:sp>
@@ -3863,7 +4655,7 @@
             <a:r>
               <a:rPr lang="en-US" sz="1400" dirty="0">
                 <a:solidFill>
-                  <a:srgbClr val="36454F"/>
+                  <a:srgbClr val="32373C"/>
                 </a:solidFill>
                 <a:latin typeface="Calibri" pitchFamily="34" charset="0"/>
                 <a:ea typeface="Calibri" pitchFamily="34" charset="-122"/>
@@ -3883,7 +4675,7 @@
             <a:r>
               <a:rPr lang="en-US" sz="1400" dirty="0">
                 <a:solidFill>
-                  <a:srgbClr val="36454F"/>
+                  <a:srgbClr val="32373C"/>
                 </a:solidFill>
                 <a:latin typeface="Calibri" pitchFamily="34" charset="0"/>
                 <a:ea typeface="Calibri" pitchFamily="34" charset="-122"/>
@@ -3903,7 +4695,7 @@
             <a:r>
               <a:rPr lang="en-US" sz="1400" dirty="0">
                 <a:solidFill>
-                  <a:srgbClr val="36454F"/>
+                  <a:srgbClr val="32373C"/>
                 </a:solidFill>
                 <a:latin typeface="Calibri" pitchFamily="34" charset="0"/>
                 <a:ea typeface="Calibri" pitchFamily="34" charset="-122"/>
@@ -3958,7 +4750,7 @@
             <a:r>
               <a:rPr lang="en-US" sz="1000" dirty="0">
                 <a:solidFill>
-                  <a:srgbClr val="8892B0"/>
+                  <a:srgbClr val="9A93B5"/>
                 </a:solidFill>
                 <a:latin typeface="Calibri" pitchFamily="34" charset="0"/>
                 <a:ea typeface="Calibri" pitchFamily="34" charset="-122"/>
@@ -3997,7 +4789,7 @@
             <a:r>
               <a:rPr lang="en-US" sz="1000" dirty="0">
                 <a:solidFill>
-                  <a:srgbClr val="8892B0"/>
+                  <a:srgbClr val="9A93B5"/>
                 </a:solidFill>
                 <a:latin typeface="Calibri" pitchFamily="34" charset="0"/>
                 <a:ea typeface="Calibri" pitchFamily="34" charset="-122"/>
@@ -4023,7 +4815,7 @@
     <p:bg>
       <p:bgPr>
         <a:solidFill>
-          <a:srgbClr val="1E2761"/>
+          <a:srgbClr val="FFFFFF"/>
         </a:solidFill>
       </p:bgPr>
     </p:bg>
@@ -4050,7 +4842,7 @@
         <p:spPr>
           <a:xfrm>
             <a:off x="548640" y="457200"/>
-            <a:ext cx="10972800" cy="457200"/>
+            <a:ext cx="10972800" cy="411480"/>
           </a:xfrm>
           <a:prstGeom prst="rect">
             <a:avLst/>
@@ -4066,15 +4858,15 @@
               <a:buNone/>
             </a:pPr>
             <a:r>
-              <a:rPr lang="en-US" sz="1400" b="1" spc="100" kern="0" dirty="0">
-                <a:solidFill>
-                  <a:srgbClr val="F96167"/>
-                </a:solidFill>
-                <a:latin typeface="Calibri" pitchFamily="34" charset="0"/>
-                <a:ea typeface="Calibri" pitchFamily="34" charset="-122"/>
-                <a:cs typeface="Calibri" pitchFamily="34" charset="-120"/>
-              </a:rPr>
-              <a:t>04  ·  Antes del contenido, un problema de canal</a:t>
+              <a:rPr lang="en-US" sz="1400" b="1" spc="150" kern="0" dirty="0">
+                <a:solidFill>
+                  <a:srgbClr val="44C5E3"/>
+                </a:solidFill>
+                <a:latin typeface="Calibri" pitchFamily="34" charset="0"/>
+                <a:ea typeface="Calibri" pitchFamily="34" charset="-122"/>
+                <a:cs typeface="Calibri" pitchFamily="34" charset="-120"/>
+              </a:rPr>
+              <a:t>CÓMO SE MIDE  ·  SECCIÓN 10 DEL ANÁLISIS</a:t>
             </a:r>
             <a:endParaRPr lang="en-US" sz="1400" dirty="0"/>
           </a:p>
@@ -4089,7 +4881,7 @@
         <p:spPr>
           <a:xfrm>
             <a:off x="548640" y="868680"/>
-            <a:ext cx="10698480" cy="822960"/>
+            <a:ext cx="10698480" cy="731520"/>
           </a:xfrm>
           <a:prstGeom prst="rect">
             <a:avLst/>
@@ -4107,13 +4899,13 @@
             <a:r>
               <a:rPr lang="en-US" sz="3000" b="1" dirty="0">
                 <a:solidFill>
-                  <a:srgbClr val="FFFFFF"/>
-                </a:solidFill>
-                <a:latin typeface="Cambria" pitchFamily="34" charset="0"/>
-                <a:ea typeface="Cambria" pitchFamily="34" charset="-122"/>
-                <a:cs typeface="Cambria" pitchFamily="34" charset="-120"/>
-              </a:rPr>
-              <a:t>Solo 17 de cada 100 llamadas llegan a una respuesta</a:t>
+                  <a:srgbClr val="4A3184"/>
+                </a:solidFill>
+                <a:latin typeface="Calibri" pitchFamily="34" charset="0"/>
+                <a:ea typeface="Calibri" pitchFamily="34" charset="-122"/>
+                <a:cs typeface="Calibri" pitchFamily="34" charset="-120"/>
+              </a:rPr>
+              <a:t>Segmentación de vocabulario por pregunta</a:t>
             </a:r>
             <a:endParaRPr lang="en-US" sz="3000" dirty="0"/>
           </a:p>
@@ -4127,8 +4919,8 @@
         </p:nvSpPr>
         <p:spPr>
           <a:xfrm>
-            <a:off x="548640" y="2377440"/>
-            <a:ext cx="1828800" cy="548640"/>
+            <a:off x="548640" y="1536192"/>
+            <a:ext cx="10515600" cy="365760"/>
           </a:xfrm>
           <a:prstGeom prst="rect">
             <a:avLst/>
@@ -4144,78 +4936,80 @@
               <a:buNone/>
             </a:pPr>
             <a:r>
-              <a:rPr lang="en-US" sz="2600" b="1" dirty="0">
-                <a:solidFill>
-                  <a:srgbClr val="FFFFFF"/>
-                </a:solidFill>
-                <a:latin typeface="Cambria" pitchFamily="34" charset="0"/>
-                <a:ea typeface="Cambria" pitchFamily="34" charset="-122"/>
-                <a:cs typeface="Cambria" pitchFamily="34" charset="-120"/>
-              </a:rPr>
-              <a:t>377</a:t>
-            </a:r>
-            <a:endParaRPr lang="en-US" sz="2600" dirty="0"/>
-          </a:p>
-        </p:txBody>
-      </p:sp>
-      <p:sp>
-        <p:nvSpPr>
-          <p:cNvPr id="5" name="Shape 3"/>
+              <a:rPr lang="en-US" sz="1350" dirty="0">
+                <a:solidFill>
+                  <a:srgbClr val="32373C"/>
+                </a:solidFill>
+                <a:latin typeface="Calibri" pitchFamily="34" charset="0"/>
+                <a:ea typeface="Calibri" pitchFamily="34" charset="-122"/>
+                <a:cs typeface="Calibri" pitchFamily="34" charset="-120"/>
+              </a:rPr>
+              <a:t>Un diccionario de palabras positivas y negativas en español, con manejo de negación, clasifica cada respuesta abierta.</a:t>
+            </a:r>
+            <a:endParaRPr lang="en-US" sz="1350" dirty="0"/>
+          </a:p>
+        </p:txBody>
+      </p:sp>
+      <p:sp>
+        <p:nvSpPr>
+          <p:cNvPr id="5" name="Text 3"/>
+          <p:cNvSpPr txBox="1"/>
+          <p:nvPr/>
+        </p:nvSpPr>
+        <p:spPr>
+          <a:xfrm>
+            <a:off x="548640" y="2057400"/>
+            <a:ext cx="3657600" cy="274320"/>
+          </a:xfrm>
+          <a:prstGeom prst="rect">
+            <a:avLst/>
+          </a:prstGeom>
+          <a:noFill/>
+          <a:ln/>
+        </p:spPr>
+        <p:txBody>
+          <a:bodyPr wrap="square" lIns="0" tIns="0" rIns="0" bIns="0" rtlCol="0" anchor="ctr"/>
+          <a:lstStyle/>
+          <a:p>
+            <a:pPr indent="0" marL="0">
+              <a:buNone/>
+            </a:pPr>
+            <a:r>
+              <a:rPr lang="en-US" sz="1100" b="1" spc="100" kern="0" dirty="0">
+                <a:solidFill>
+                  <a:srgbClr val="44C5E3"/>
+                </a:solidFill>
+                <a:latin typeface="Calibri" pitchFamily="34" charset="0"/>
+                <a:ea typeface="Calibri" pitchFamily="34" charset="-122"/>
+                <a:cs typeface="Calibri" pitchFamily="34" charset="-120"/>
+              </a:rPr>
+              <a:t>PALABRAS POSITIVAS</a:t>
+            </a:r>
+            <a:endParaRPr lang="en-US" sz="1100" dirty="0"/>
+          </a:p>
+        </p:txBody>
+      </p:sp>
+      <p:sp>
+        <p:nvSpPr>
+          <p:cNvPr id="6" name="Shape 4"/>
           <p:cNvSpPr/>
           <p:nvPr/>
         </p:nvSpPr>
         <p:spPr>
           <a:xfrm>
-            <a:off x="548640" y="2971800"/>
-            <a:ext cx="9601200" cy="640080"/>
-          </a:xfrm>
-          <a:prstGeom prst="rect">
-            <a:avLst/>
+            <a:off x="548640" y="2395728"/>
+            <a:ext cx="758952" cy="384048"/>
+          </a:xfrm>
+          <a:prstGeom prst="roundRect">
+            <a:avLst>
+              <a:gd name="adj" fmla="val 50000"/>
+            </a:avLst>
           </a:prstGeom>
           <a:solidFill>
-            <a:srgbClr val="364285"/>
+            <a:srgbClr val="E3F6FB"/>
           </a:solidFill>
           <a:ln/>
         </p:spPr>
-      </p:sp>
-      <p:sp>
-        <p:nvSpPr>
-          <p:cNvPr id="6" name="Text 4"/>
-          <p:cNvSpPr txBox="1"/>
-          <p:nvPr/>
-        </p:nvSpPr>
-        <p:spPr>
-          <a:xfrm>
-            <a:off x="731520" y="2971800"/>
-            <a:ext cx="9144000" cy="640080"/>
-          </a:xfrm>
-          <a:prstGeom prst="rect">
-            <a:avLst/>
-          </a:prstGeom>
-          <a:noFill/>
-          <a:ln/>
-        </p:spPr>
-        <p:txBody>
-          <a:bodyPr wrap="square" lIns="0" tIns="0" rIns="0" bIns="0" rtlCol="0" anchor="ctr"/>
-          <a:lstStyle/>
-          <a:p>
-            <a:pPr indent="0" marL="0">
-              <a:buNone/>
-            </a:pPr>
-            <a:r>
-              <a:rPr lang="en-US" sz="1500" dirty="0">
-                <a:solidFill>
-                  <a:srgbClr val="CADCFC"/>
-                </a:solidFill>
-                <a:latin typeface="Calibri" pitchFamily="34" charset="0"/>
-                <a:ea typeface="Calibri" pitchFamily="34" charset="-122"/>
-                <a:cs typeface="Calibri" pitchFamily="34" charset="-120"/>
-              </a:rPr>
-              <a:t>Intentos de llamada</a:t>
-            </a:r>
-            <a:endParaRPr lang="en-US" sz="1500" dirty="0"/>
-          </a:p>
-        </p:txBody>
       </p:sp>
       <p:sp>
         <p:nvSpPr>
@@ -4225,8 +5019,8 @@
         </p:nvSpPr>
         <p:spPr>
           <a:xfrm>
-            <a:off x="548640" y="3931920"/>
-            <a:ext cx="1828800" cy="548640"/>
+            <a:off x="548640" y="2395728"/>
+            <a:ext cx="758952" cy="384048"/>
           </a:xfrm>
           <a:prstGeom prst="rect">
             <a:avLst/>
@@ -4238,21 +5032,21 @@
           <a:bodyPr wrap="square" lIns="0" tIns="0" rIns="0" bIns="0" rtlCol="0" anchor="ctr"/>
           <a:lstStyle/>
           <a:p>
-            <a:pPr indent="0" marL="0">
-              <a:buNone/>
-            </a:pPr>
-            <a:r>
-              <a:rPr lang="en-US" sz="2600" b="1" dirty="0">
-                <a:solidFill>
-                  <a:srgbClr val="F96167"/>
-                </a:solidFill>
-                <a:latin typeface="Cambria" pitchFamily="34" charset="0"/>
-                <a:ea typeface="Cambria" pitchFamily="34" charset="-122"/>
-                <a:cs typeface="Cambria" pitchFamily="34" charset="-120"/>
-              </a:rPr>
-              <a:t>64</a:t>
-            </a:r>
-            <a:endParaRPr lang="en-US" sz="2600" dirty="0"/>
+            <a:pPr algn="ctr" indent="0" marL="0">
+              <a:buNone/>
+            </a:pPr>
+            <a:r>
+              <a:rPr lang="en-US" sz="1300" dirty="0">
+                <a:solidFill>
+                  <a:srgbClr val="1E7A93"/>
+                </a:solidFill>
+                <a:latin typeface="Calibri" pitchFamily="34" charset="0"/>
+                <a:ea typeface="Calibri" pitchFamily="34" charset="-122"/>
+                <a:cs typeface="Calibri" pitchFamily="34" charset="-120"/>
+              </a:rPr>
+              <a:t>buena</a:t>
+            </a:r>
+            <a:endParaRPr lang="en-US" sz="1300" dirty="0"/>
           </a:p>
         </p:txBody>
       </p:sp>
@@ -4264,14 +5058,16 @@
         </p:nvSpPr>
         <p:spPr>
           <a:xfrm>
-            <a:off x="548640" y="4526280"/>
-            <a:ext cx="1636776" cy="640080"/>
-          </a:xfrm>
-          <a:prstGeom prst="rect">
-            <a:avLst/>
+            <a:off x="1444752" y="2395728"/>
+            <a:ext cx="859536" cy="384048"/>
+          </a:xfrm>
+          <a:prstGeom prst="roundRect">
+            <a:avLst>
+              <a:gd name="adj" fmla="val 50000"/>
+            </a:avLst>
           </a:prstGeom>
           <a:solidFill>
-            <a:srgbClr val="F96167"/>
+            <a:srgbClr val="E3F6FB"/>
           </a:solidFill>
           <a:ln/>
         </p:spPr>
@@ -4284,8 +5080,8 @@
         </p:nvSpPr>
         <p:spPr>
           <a:xfrm>
-            <a:off x="2468880" y="4526280"/>
-            <a:ext cx="4572000" cy="640080"/>
+            <a:off x="1444752" y="2395728"/>
+            <a:ext cx="859536" cy="384048"/>
           </a:xfrm>
           <a:prstGeom prst="rect">
             <a:avLst/>
@@ -4297,62 +5093,45 @@
           <a:bodyPr wrap="square" lIns="0" tIns="0" rIns="0" bIns="0" rtlCol="0" anchor="ctr"/>
           <a:lstStyle/>
           <a:p>
-            <a:pPr indent="0" marL="0">
-              <a:buNone/>
-            </a:pPr>
-            <a:r>
-              <a:rPr lang="en-US" sz="1500" dirty="0">
-                <a:solidFill>
-                  <a:srgbClr val="FFFFFF"/>
-                </a:solidFill>
-                <a:latin typeface="Calibri" pitchFamily="34" charset="0"/>
-                <a:ea typeface="Calibri" pitchFamily="34" charset="-122"/>
-                <a:cs typeface="Calibri" pitchFamily="34" charset="-120"/>
-              </a:rPr>
-              <a:t>Llamadas efectivas</a:t>
-            </a:r>
-            <a:endParaRPr lang="en-US" sz="1500" dirty="0"/>
-          </a:p>
-        </p:txBody>
-      </p:sp>
-      <p:sp>
-        <p:nvSpPr>
-          <p:cNvPr id="10" name="Text 8"/>
-          <p:cNvSpPr txBox="1"/>
-          <p:nvPr/>
-        </p:nvSpPr>
-        <p:spPr>
-          <a:xfrm>
-            <a:off x="548640" y="5440680"/>
-            <a:ext cx="4572000" cy="822960"/>
-          </a:xfrm>
-          <a:prstGeom prst="rect">
-            <a:avLst/>
-          </a:prstGeom>
-          <a:noFill/>
-          <a:ln/>
-        </p:spPr>
-        <p:txBody>
-          <a:bodyPr wrap="square" lIns="0" tIns="0" rIns="0" bIns="0" rtlCol="0" anchor="ctr"/>
-          <a:lstStyle/>
-          <a:p>
-            <a:pPr algn="l" indent="0" marL="0">
-              <a:buNone/>
-            </a:pPr>
-            <a:r>
-              <a:rPr lang="en-US" sz="4400" b="1" dirty="0">
-                <a:solidFill>
-                  <a:srgbClr val="FFFFFF"/>
-                </a:solidFill>
-                <a:latin typeface="Cambria" pitchFamily="34" charset="0"/>
-                <a:ea typeface="Cambria" pitchFamily="34" charset="-122"/>
-                <a:cs typeface="Cambria" pitchFamily="34" charset="-120"/>
-              </a:rPr>
-              <a:t>17%</a:t>
-            </a:r>
-            <a:endParaRPr lang="en-US" sz="4400" dirty="0"/>
-          </a:p>
-        </p:txBody>
+            <a:pPr algn="ctr" indent="0" marL="0">
+              <a:buNone/>
+            </a:pPr>
+            <a:r>
+              <a:rPr lang="en-US" sz="1300" dirty="0">
+                <a:solidFill>
+                  <a:srgbClr val="1E7A93"/>
+                </a:solidFill>
+                <a:latin typeface="Calibri" pitchFamily="34" charset="0"/>
+                <a:ea typeface="Calibri" pitchFamily="34" charset="-122"/>
+                <a:cs typeface="Calibri" pitchFamily="34" charset="-120"/>
+              </a:rPr>
+              <a:t>rápido</a:t>
+            </a:r>
+            <a:endParaRPr lang="en-US" sz="1300" dirty="0"/>
+          </a:p>
+        </p:txBody>
+      </p:sp>
+      <p:sp>
+        <p:nvSpPr>
+          <p:cNvPr id="10" name="Shape 8"/>
+          <p:cNvSpPr/>
+          <p:nvPr/>
+        </p:nvSpPr>
+        <p:spPr>
+          <a:xfrm>
+            <a:off x="2441448" y="2395728"/>
+            <a:ext cx="758952" cy="384048"/>
+          </a:xfrm>
+          <a:prstGeom prst="roundRect">
+            <a:avLst>
+              <a:gd name="adj" fmla="val 50000"/>
+            </a:avLst>
+          </a:prstGeom>
+          <a:solidFill>
+            <a:srgbClr val="E3F6FB"/>
+          </a:solidFill>
+          <a:ln/>
+        </p:spPr>
       </p:sp>
       <p:sp>
         <p:nvSpPr>
@@ -4362,8 +5141,8 @@
         </p:nvSpPr>
         <p:spPr>
           <a:xfrm>
-            <a:off x="548640" y="6263640"/>
-            <a:ext cx="4572000" cy="1005840"/>
+            <a:off x="2441448" y="2395728"/>
+            <a:ext cx="758952" cy="384048"/>
           </a:xfrm>
           <a:prstGeom prst="rect">
             <a:avLst/>
@@ -4375,70 +5154,549 @@
           <a:bodyPr wrap="square" lIns="0" tIns="0" rIns="0" bIns="0" rtlCol="0" anchor="ctr"/>
           <a:lstStyle/>
           <a:p>
-            <a:pPr algn="l" indent="0" marL="0">
+            <a:pPr algn="ctr" indent="0" marL="0">
+              <a:buNone/>
+            </a:pPr>
+            <a:r>
+              <a:rPr lang="en-US" sz="1300" dirty="0">
+                <a:solidFill>
+                  <a:srgbClr val="1E7A93"/>
+                </a:solidFill>
+                <a:latin typeface="Calibri" pitchFamily="34" charset="0"/>
+                <a:ea typeface="Calibri" pitchFamily="34" charset="-122"/>
+                <a:cs typeface="Calibri" pitchFamily="34" charset="-120"/>
+              </a:rPr>
+              <a:t>apoyo</a:t>
+            </a:r>
+            <a:endParaRPr lang="en-US" sz="1300" dirty="0"/>
+          </a:p>
+        </p:txBody>
+      </p:sp>
+      <p:sp>
+        <p:nvSpPr>
+          <p:cNvPr id="12" name="Shape 10"/>
+          <p:cNvSpPr/>
+          <p:nvPr/>
+        </p:nvSpPr>
+        <p:spPr>
+          <a:xfrm>
+            <a:off x="3337560" y="2395728"/>
+            <a:ext cx="1161288" cy="384048"/>
+          </a:xfrm>
+          <a:prstGeom prst="roundRect">
+            <a:avLst>
+              <a:gd name="adj" fmla="val 50000"/>
+            </a:avLst>
+          </a:prstGeom>
+          <a:solidFill>
+            <a:srgbClr val="E3F6FB"/>
+          </a:solidFill>
+          <a:ln/>
+        </p:spPr>
+      </p:sp>
+      <p:sp>
+        <p:nvSpPr>
+          <p:cNvPr id="13" name="Text 11"/>
+          <p:cNvSpPr txBox="1"/>
+          <p:nvPr/>
+        </p:nvSpPr>
+        <p:spPr>
+          <a:xfrm>
+            <a:off x="3337560" y="2395728"/>
+            <a:ext cx="1161288" cy="384048"/>
+          </a:xfrm>
+          <a:prstGeom prst="rect">
+            <a:avLst/>
+          </a:prstGeom>
+          <a:noFill/>
+          <a:ln/>
+        </p:spPr>
+        <p:txBody>
+          <a:bodyPr wrap="square" lIns="0" tIns="0" rIns="0" bIns="0" rtlCol="0" anchor="ctr"/>
+          <a:lstStyle/>
+          <a:p>
+            <a:pPr algn="ctr" indent="0" marL="0">
+              <a:buNone/>
+            </a:pPr>
+            <a:r>
+              <a:rPr lang="en-US" sz="1300" dirty="0">
+                <a:solidFill>
+                  <a:srgbClr val="1E7A93"/>
+                </a:solidFill>
+                <a:latin typeface="Calibri" pitchFamily="34" charset="0"/>
+                <a:ea typeface="Calibri" pitchFamily="34" charset="-122"/>
+                <a:cs typeface="Calibri" pitchFamily="34" charset="-120"/>
+              </a:rPr>
+              <a:t>confianza</a:t>
+            </a:r>
+            <a:endParaRPr lang="en-US" sz="1300" dirty="0"/>
+          </a:p>
+        </p:txBody>
+      </p:sp>
+      <p:sp>
+        <p:nvSpPr>
+          <p:cNvPr id="14" name="Text 12"/>
+          <p:cNvSpPr txBox="1"/>
+          <p:nvPr/>
+        </p:nvSpPr>
+        <p:spPr>
+          <a:xfrm>
+            <a:off x="548640" y="3017520"/>
+            <a:ext cx="3657600" cy="274320"/>
+          </a:xfrm>
+          <a:prstGeom prst="rect">
+            <a:avLst/>
+          </a:prstGeom>
+          <a:noFill/>
+          <a:ln/>
+        </p:spPr>
+        <p:txBody>
+          <a:bodyPr wrap="square" lIns="0" tIns="0" rIns="0" bIns="0" rtlCol="0" anchor="ctr"/>
+          <a:lstStyle/>
+          <a:p>
+            <a:pPr indent="0" marL="0">
+              <a:buNone/>
+            </a:pPr>
+            <a:r>
+              <a:rPr lang="en-US" sz="1100" b="1" spc="100" kern="0" dirty="0">
+                <a:solidFill>
+                  <a:srgbClr val="4A3184"/>
+                </a:solidFill>
+                <a:latin typeface="Calibri" pitchFamily="34" charset="0"/>
+                <a:ea typeface="Calibri" pitchFamily="34" charset="-122"/>
+                <a:cs typeface="Calibri" pitchFamily="34" charset="-120"/>
+              </a:rPr>
+              <a:t>PALABRAS NEGATIVAS</a:t>
+            </a:r>
+            <a:endParaRPr lang="en-US" sz="1100" dirty="0"/>
+          </a:p>
+        </p:txBody>
+      </p:sp>
+      <p:sp>
+        <p:nvSpPr>
+          <p:cNvPr id="15" name="Shape 13"/>
+          <p:cNvSpPr/>
+          <p:nvPr/>
+        </p:nvSpPr>
+        <p:spPr>
+          <a:xfrm>
+            <a:off x="548640" y="3355848"/>
+            <a:ext cx="557784" cy="384048"/>
+          </a:xfrm>
+          <a:prstGeom prst="roundRect">
+            <a:avLst>
+              <a:gd name="adj" fmla="val 50000"/>
+            </a:avLst>
+          </a:prstGeom>
+          <a:solidFill>
+            <a:srgbClr val="C9BEDD"/>
+          </a:solidFill>
+          <a:ln/>
+        </p:spPr>
+      </p:sp>
+      <p:sp>
+        <p:nvSpPr>
+          <p:cNvPr id="16" name="Text 14"/>
+          <p:cNvSpPr txBox="1"/>
+          <p:nvPr/>
+        </p:nvSpPr>
+        <p:spPr>
+          <a:xfrm>
+            <a:off x="548640" y="3355848"/>
+            <a:ext cx="557784" cy="384048"/>
+          </a:xfrm>
+          <a:prstGeom prst="rect">
+            <a:avLst/>
+          </a:prstGeom>
+          <a:noFill/>
+          <a:ln/>
+        </p:spPr>
+        <p:txBody>
+          <a:bodyPr wrap="square" lIns="0" tIns="0" rIns="0" bIns="0" rtlCol="0" anchor="ctr"/>
+          <a:lstStyle/>
+          <a:p>
+            <a:pPr algn="ctr" indent="0" marL="0">
+              <a:buNone/>
+            </a:pPr>
+            <a:r>
+              <a:rPr lang="en-US" sz="1300" dirty="0">
+                <a:solidFill>
+                  <a:srgbClr val="4A3184"/>
+                </a:solidFill>
+                <a:latin typeface="Calibri" pitchFamily="34" charset="0"/>
+                <a:ea typeface="Calibri" pitchFamily="34" charset="-122"/>
+                <a:cs typeface="Calibri" pitchFamily="34" charset="-120"/>
+              </a:rPr>
+              <a:t>mal</a:t>
+            </a:r>
+            <a:endParaRPr lang="en-US" sz="1300" dirty="0"/>
+          </a:p>
+        </p:txBody>
+      </p:sp>
+      <p:sp>
+        <p:nvSpPr>
+          <p:cNvPr id="17" name="Shape 15"/>
+          <p:cNvSpPr/>
+          <p:nvPr/>
+        </p:nvSpPr>
+        <p:spPr>
+          <a:xfrm>
+            <a:off x="1243584" y="3355848"/>
+            <a:ext cx="1060704" cy="384048"/>
+          </a:xfrm>
+          <a:prstGeom prst="roundRect">
+            <a:avLst>
+              <a:gd name="adj" fmla="val 50000"/>
+            </a:avLst>
+          </a:prstGeom>
+          <a:solidFill>
+            <a:srgbClr val="C9BEDD"/>
+          </a:solidFill>
+          <a:ln/>
+        </p:spPr>
+      </p:sp>
+      <p:sp>
+        <p:nvSpPr>
+          <p:cNvPr id="18" name="Text 16"/>
+          <p:cNvSpPr txBox="1"/>
+          <p:nvPr/>
+        </p:nvSpPr>
+        <p:spPr>
+          <a:xfrm>
+            <a:off x="1243584" y="3355848"/>
+            <a:ext cx="1060704" cy="384048"/>
+          </a:xfrm>
+          <a:prstGeom prst="rect">
+            <a:avLst/>
+          </a:prstGeom>
+          <a:noFill/>
+          <a:ln/>
+        </p:spPr>
+        <p:txBody>
+          <a:bodyPr wrap="square" lIns="0" tIns="0" rIns="0" bIns="0" rtlCol="0" anchor="ctr"/>
+          <a:lstStyle/>
+          <a:p>
+            <a:pPr algn="ctr" indent="0" marL="0">
+              <a:buNone/>
+            </a:pPr>
+            <a:r>
+              <a:rPr lang="en-US" sz="1300" dirty="0">
+                <a:solidFill>
+                  <a:srgbClr val="4A3184"/>
+                </a:solidFill>
+                <a:latin typeface="Calibri" pitchFamily="34" charset="0"/>
+                <a:ea typeface="Calibri" pitchFamily="34" charset="-122"/>
+                <a:cs typeface="Calibri" pitchFamily="34" charset="-120"/>
+              </a:rPr>
+              <a:t>problema</a:t>
+            </a:r>
+            <a:endParaRPr lang="en-US" sz="1300" dirty="0"/>
+          </a:p>
+        </p:txBody>
+      </p:sp>
+      <p:sp>
+        <p:nvSpPr>
+          <p:cNvPr id="19" name="Shape 17"/>
+          <p:cNvSpPr/>
+          <p:nvPr/>
+        </p:nvSpPr>
+        <p:spPr>
+          <a:xfrm>
+            <a:off x="2441448" y="3355848"/>
+            <a:ext cx="758952" cy="384048"/>
+          </a:xfrm>
+          <a:prstGeom prst="roundRect">
+            <a:avLst>
+              <a:gd name="adj" fmla="val 50000"/>
+            </a:avLst>
+          </a:prstGeom>
+          <a:solidFill>
+            <a:srgbClr val="C9BEDD"/>
+          </a:solidFill>
+          <a:ln/>
+        </p:spPr>
+      </p:sp>
+      <p:sp>
+        <p:nvSpPr>
+          <p:cNvPr id="20" name="Text 18"/>
+          <p:cNvSpPr txBox="1"/>
+          <p:nvPr/>
+        </p:nvSpPr>
+        <p:spPr>
+          <a:xfrm>
+            <a:off x="2441448" y="3355848"/>
+            <a:ext cx="758952" cy="384048"/>
+          </a:xfrm>
+          <a:prstGeom prst="rect">
+            <a:avLst/>
+          </a:prstGeom>
+          <a:noFill/>
+          <a:ln/>
+        </p:spPr>
+        <p:txBody>
+          <a:bodyPr wrap="square" lIns="0" tIns="0" rIns="0" bIns="0" rtlCol="0" anchor="ctr"/>
+          <a:lstStyle/>
+          <a:p>
+            <a:pPr algn="ctr" indent="0" marL="0">
+              <a:buNone/>
+            </a:pPr>
+            <a:r>
+              <a:rPr lang="en-US" sz="1300" dirty="0">
+                <a:solidFill>
+                  <a:srgbClr val="4A3184"/>
+                </a:solidFill>
+                <a:latin typeface="Calibri" pitchFamily="34" charset="0"/>
+                <a:ea typeface="Calibri" pitchFamily="34" charset="-122"/>
+                <a:cs typeface="Calibri" pitchFamily="34" charset="-120"/>
+              </a:rPr>
+              <a:t>miedo</a:t>
+            </a:r>
+            <a:endParaRPr lang="en-US" sz="1300" dirty="0"/>
+          </a:p>
+        </p:txBody>
+      </p:sp>
+      <p:sp>
+        <p:nvSpPr>
+          <p:cNvPr id="21" name="Shape 19"/>
+          <p:cNvSpPr/>
+          <p:nvPr/>
+        </p:nvSpPr>
+        <p:spPr>
+          <a:xfrm>
+            <a:off x="3337560" y="3355848"/>
+            <a:ext cx="859536" cy="384048"/>
+          </a:xfrm>
+          <a:prstGeom prst="roundRect">
+            <a:avLst>
+              <a:gd name="adj" fmla="val 50000"/>
+            </a:avLst>
+          </a:prstGeom>
+          <a:solidFill>
+            <a:srgbClr val="C9BEDD"/>
+          </a:solidFill>
+          <a:ln/>
+        </p:spPr>
+      </p:sp>
+      <p:sp>
+        <p:nvSpPr>
+          <p:cNvPr id="22" name="Text 20"/>
+          <p:cNvSpPr txBox="1"/>
+          <p:nvPr/>
+        </p:nvSpPr>
+        <p:spPr>
+          <a:xfrm>
+            <a:off x="3337560" y="3355848"/>
+            <a:ext cx="859536" cy="384048"/>
+          </a:xfrm>
+          <a:prstGeom prst="rect">
+            <a:avLst/>
+          </a:prstGeom>
+          <a:noFill/>
+          <a:ln/>
+        </p:spPr>
+        <p:txBody>
+          <a:bodyPr wrap="square" lIns="0" tIns="0" rIns="0" bIns="0" rtlCol="0" anchor="ctr"/>
+          <a:lstStyle/>
+          <a:p>
+            <a:pPr algn="ctr" indent="0" marL="0">
+              <a:buNone/>
+            </a:pPr>
+            <a:r>
+              <a:rPr lang="en-US" sz="1300" dirty="0">
+                <a:solidFill>
+                  <a:srgbClr val="4A3184"/>
+                </a:solidFill>
+                <a:latin typeface="Calibri" pitchFamily="34" charset="0"/>
+                <a:ea typeface="Calibri" pitchFamily="34" charset="-122"/>
+                <a:cs typeface="Calibri" pitchFamily="34" charset="-120"/>
+              </a:rPr>
+              <a:t>atraso</a:t>
+            </a:r>
+            <a:endParaRPr lang="en-US" sz="1300" dirty="0"/>
+          </a:p>
+        </p:txBody>
+      </p:sp>
+      <p:sp>
+        <p:nvSpPr>
+          <p:cNvPr id="23" name="Text 21"/>
+          <p:cNvSpPr txBox="1"/>
+          <p:nvPr/>
+        </p:nvSpPr>
+        <p:spPr>
+          <a:xfrm>
+            <a:off x="548640" y="3977640"/>
+            <a:ext cx="4206240" cy="365760"/>
+          </a:xfrm>
+          <a:prstGeom prst="rect">
+            <a:avLst/>
+          </a:prstGeom>
+          <a:noFill/>
+          <a:ln/>
+        </p:spPr>
+        <p:txBody>
+          <a:bodyPr wrap="square" lIns="0" tIns="0" rIns="0" bIns="0" rtlCol="0" anchor="ctr"/>
+          <a:lstStyle/>
+          <a:p>
+            <a:pPr indent="0" marL="0">
+              <a:buNone/>
+            </a:pPr>
+            <a:r>
+              <a:rPr lang="en-US" sz="1150" i="1" dirty="0">
+                <a:solidFill>
+                  <a:srgbClr val="6B6480"/>
+                </a:solidFill>
+                <a:latin typeface="Calibri" pitchFamily="34" charset="0"/>
+                <a:ea typeface="Calibri" pitchFamily="34" charset="-122"/>
+                <a:cs typeface="Calibri" pitchFamily="34" charset="-120"/>
+              </a:rPr>
+              <a:t>Negación: “no hay apoyo” cuenta como negativo, no positivo.</a:t>
+            </a:r>
+            <a:endParaRPr lang="en-US" sz="1150" dirty="0"/>
+          </a:p>
+        </p:txBody>
+      </p:sp>
+      <p:sp>
+        <p:nvSpPr>
+          <p:cNvPr id="24" name="Shape 22"/>
+          <p:cNvSpPr/>
+          <p:nvPr/>
+        </p:nvSpPr>
+        <p:spPr>
+          <a:xfrm>
+            <a:off x="548640" y="4526280"/>
+            <a:ext cx="4206240" cy="1600200"/>
+          </a:xfrm>
+          <a:prstGeom prst="roundRect">
+            <a:avLst>
+              <a:gd name="adj" fmla="val 5714"/>
+            </a:avLst>
+          </a:prstGeom>
+          <a:solidFill>
+            <a:srgbClr val="F5F3FA"/>
+          </a:solidFill>
+          <a:ln/>
+        </p:spPr>
+      </p:sp>
+      <p:sp>
+        <p:nvSpPr>
+          <p:cNvPr id="25" name="Text 23"/>
+          <p:cNvSpPr txBox="1"/>
+          <p:nvPr/>
+        </p:nvSpPr>
+        <p:spPr>
+          <a:xfrm>
+            <a:off x="822960" y="4709160"/>
+            <a:ext cx="1463040" cy="685800"/>
+          </a:xfrm>
+          <a:prstGeom prst="rect">
+            <a:avLst/>
+          </a:prstGeom>
+          <a:noFill/>
+          <a:ln/>
+        </p:spPr>
+        <p:txBody>
+          <a:bodyPr wrap="square" lIns="0" tIns="0" rIns="0" bIns="0" rtlCol="0" anchor="ctr"/>
+          <a:lstStyle/>
+          <a:p>
+            <a:pPr indent="0" marL="0">
+              <a:buNone/>
+            </a:pPr>
+            <a:r>
+              <a:rPr lang="en-US" sz="3400" b="1" dirty="0">
+                <a:solidFill>
+                  <a:srgbClr val="4A3184"/>
+                </a:solidFill>
+                <a:latin typeface="Calibri" pitchFamily="34" charset="0"/>
+                <a:ea typeface="Calibri" pitchFamily="34" charset="-122"/>
+                <a:cs typeface="Calibri" pitchFamily="34" charset="-120"/>
+              </a:rPr>
+              <a:t>64</a:t>
+            </a:r>
+            <a:endParaRPr lang="en-US" sz="3400" dirty="0"/>
+          </a:p>
+        </p:txBody>
+      </p:sp>
+      <p:sp>
+        <p:nvSpPr>
+          <p:cNvPr id="26" name="Text 24"/>
+          <p:cNvSpPr txBox="1"/>
+          <p:nvPr/>
+        </p:nvSpPr>
+        <p:spPr>
+          <a:xfrm>
+            <a:off x="822960" y="5394960"/>
+            <a:ext cx="3657600" cy="640080"/>
+          </a:xfrm>
+          <a:prstGeom prst="rect">
+            <a:avLst/>
+          </a:prstGeom>
+          <a:noFill/>
+          <a:ln/>
+        </p:spPr>
+        <p:txBody>
+          <a:bodyPr wrap="square" lIns="0" tIns="0" rIns="0" bIns="0" rtlCol="0" anchor="ctr"/>
+          <a:lstStyle/>
+          <a:p>
+            <a:pPr indent="0" marL="0">
               <a:lnSpc>
                 <a:spcPct val="110000"/>
               </a:lnSpc>
               <a:buNone/>
             </a:pPr>
             <a:r>
-              <a:rPr lang="en-US" sz="1400" dirty="0">
-                <a:solidFill>
-                  <a:srgbClr val="36454F"/>
-                </a:solidFill>
-                <a:latin typeface="Calibri" pitchFamily="34" charset="0"/>
-                <a:ea typeface="Calibri" pitchFamily="34" charset="-122"/>
-                <a:cs typeface="Calibri" pitchFamily="34" charset="-120"/>
-              </a:rPr>
-              <a:t>de efectividad de contacto — antes de</a:t>
-            </a:r>
-            <a:endParaRPr lang="en-US" sz="1400" dirty="0"/>
-          </a:p>
-          <a:p>
-            <a:pPr algn="l" indent="0" marL="0">
+              <a:rPr lang="en-US" sz="1200" dirty="0">
+                <a:solidFill>
+                  <a:srgbClr val="32373C"/>
+                </a:solidFill>
+                <a:latin typeface="Calibri" pitchFamily="34" charset="0"/>
+                <a:ea typeface="Calibri" pitchFamily="34" charset="-122"/>
+                <a:cs typeface="Calibri" pitchFamily="34" charset="-120"/>
+              </a:rPr>
+              <a:t>respuestas abiertas evaluadas</a:t>
+            </a:r>
+            <a:endParaRPr lang="en-US" sz="1200" dirty="0"/>
+          </a:p>
+          <a:p>
+            <a:pPr indent="0" marL="0">
               <a:lnSpc>
                 <a:spcPct val="110000"/>
               </a:lnSpc>
               <a:buNone/>
             </a:pPr>
             <a:r>
-              <a:rPr lang="en-US" sz="1400" dirty="0">
-                <a:solidFill>
-                  <a:srgbClr val="36454F"/>
-                </a:solidFill>
-                <a:latin typeface="Calibri" pitchFamily="34" charset="0"/>
-                <a:ea typeface="Calibri" pitchFamily="34" charset="-122"/>
-                <a:cs typeface="Calibri" pitchFamily="34" charset="-120"/>
-              </a:rPr>
-              <a:t>analizar el contenido, vale la pena revisar</a:t>
-            </a:r>
-            <a:endParaRPr lang="en-US" sz="1400" dirty="0"/>
-          </a:p>
-          <a:p>
-            <a:pPr algn="l" indent="0" marL="0">
-              <a:lnSpc>
-                <a:spcPct val="110000"/>
-              </a:lnSpc>
-              <a:buNone/>
-            </a:pPr>
-            <a:r>
-              <a:rPr lang="en-US" sz="1400" dirty="0">
-                <a:solidFill>
-                  <a:srgbClr val="36454F"/>
-                </a:solidFill>
-                <a:latin typeface="Calibri" pitchFamily="34" charset="0"/>
-                <a:ea typeface="Calibri" pitchFamily="34" charset="-122"/>
-                <a:cs typeface="Calibri" pitchFamily="34" charset="-120"/>
-              </a:rPr>
-              <a:t>horarios, números y guion de la llamada.</a:t>
-            </a:r>
-            <a:endParaRPr lang="en-US" sz="1400" dirty="0"/>
-          </a:p>
-        </p:txBody>
-      </p:sp>
-      <p:sp>
-        <p:nvSpPr>
-          <p:cNvPr id="12" name="Text 10"/>
+              <a:rPr lang="en-US" sz="1200" dirty="0">
+                <a:solidFill>
+                  <a:srgbClr val="32373C"/>
+                </a:solidFill>
+                <a:latin typeface="Calibri" pitchFamily="34" charset="0"/>
+                <a:ea typeface="Calibri" pitchFamily="34" charset="-122"/>
+                <a:cs typeface="Calibri" pitchFamily="34" charset="-120"/>
+              </a:rPr>
+              <a:t>por pregunta, sin excepciones</a:t>
+            </a:r>
+            <a:endParaRPr lang="en-US" sz="1200" dirty="0"/>
+          </a:p>
+        </p:txBody>
+      </p:sp>
+      <p:graphicFrame>
+        <p:nvGraphicFramePr>
+          <p:cNvPr id="27" name="Chart 0" descr=""/>
+          <p:cNvGraphicFramePr/>
+          <p:nvPr/>
+        </p:nvGraphicFramePr>
+        <p:xfrm>
+          <a:off x="5074920" y="1783080"/>
+          <a:ext cx="6537960" cy="4480560"/>
+        </p:xfrm>
+        <a:graphic xmlns:a="http://schemas.openxmlformats.org/drawingml/2006/main">
+          <a:graphicData uri="http://schemas.openxmlformats.org/drawingml/2006/chart">
+            <c:chart xmlns:c="http://schemas.openxmlformats.org/drawingml/2006/chart" r:id="rId1"/>
+          </a:graphicData>
+        </a:graphic>
+      </p:graphicFrame>
+      <p:sp>
+        <p:nvSpPr>
+          <p:cNvPr id="28" name="Text 25"/>
           <p:cNvSpPr txBox="1"/>
           <p:nvPr/>
         </p:nvSpPr>
@@ -4463,7 +5721,7 @@
             <a:r>
               <a:rPr lang="en-US" sz="1000" dirty="0">
                 <a:solidFill>
-                  <a:srgbClr val="8892B0"/>
+                  <a:srgbClr val="9A93B5"/>
                 </a:solidFill>
                 <a:latin typeface="Calibri" pitchFamily="34" charset="0"/>
                 <a:ea typeface="Calibri" pitchFamily="34" charset="-122"/>
@@ -4477,7 +5735,7 @@
       </p:sp>
       <p:sp>
         <p:nvSpPr>
-          <p:cNvPr id="13" name="Text 11"/>
+          <p:cNvPr id="29" name="Text 26"/>
           <p:cNvSpPr txBox="1"/>
           <p:nvPr/>
         </p:nvSpPr>
@@ -4502,7 +5760,7 @@
             <a:r>
               <a:rPr lang="en-US" sz="1000" dirty="0">
                 <a:solidFill>
-                  <a:srgbClr val="8892B0"/>
+                  <a:srgbClr val="9A93B5"/>
                 </a:solidFill>
                 <a:latin typeface="Calibri" pitchFamily="34" charset="0"/>
                 <a:ea typeface="Calibri" pitchFamily="34" charset="-122"/>
@@ -4555,7 +5813,7 @@
         <p:spPr>
           <a:xfrm>
             <a:off x="548640" y="457200"/>
-            <a:ext cx="10972800" cy="457200"/>
+            <a:ext cx="10972800" cy="411480"/>
           </a:xfrm>
           <a:prstGeom prst="rect">
             <a:avLst/>
@@ -4571,15 +5829,15 @@
               <a:buNone/>
             </a:pPr>
             <a:r>
-              <a:rPr lang="en-US" sz="1400" b="1" spc="100" kern="0" dirty="0">
-                <a:solidFill>
-                  <a:srgbClr val="F96167"/>
-                </a:solidFill>
-                <a:latin typeface="Calibri" pitchFamily="34" charset="0"/>
-                <a:ea typeface="Calibri" pitchFamily="34" charset="-122"/>
-                <a:cs typeface="Calibri" pitchFamily="34" charset="-120"/>
-              </a:rPr>
-              <a:t>05  ·  Ya sabemos por dónde empezar</a:t>
+              <a:rPr lang="en-US" sz="1400" b="1" spc="150" kern="0" dirty="0">
+                <a:solidFill>
+                  <a:srgbClr val="44C5E3"/>
+                </a:solidFill>
+                <a:latin typeface="Calibri" pitchFamily="34" charset="0"/>
+                <a:ea typeface="Calibri" pitchFamily="34" charset="-122"/>
+                <a:cs typeface="Calibri" pitchFamily="34" charset="-120"/>
+              </a:rPr>
+              <a:t>04  ·  ANTES DEL CONTENIDO, UN PROBLEMA DE CANAL</a:t>
             </a:r>
             <a:endParaRPr lang="en-US" sz="1400" dirty="0"/>
           </a:p>
@@ -4594,7 +5852,7 @@
         <p:spPr>
           <a:xfrm>
             <a:off x="548640" y="868680"/>
-            <a:ext cx="10789920" cy="822960"/>
+            <a:ext cx="10698480" cy="822960"/>
           </a:xfrm>
           <a:prstGeom prst="rect">
             <a:avLst/>
@@ -4610,17 +5868,17 @@
               <a:buNone/>
             </a:pPr>
             <a:r>
-              <a:rPr lang="en-US" sz="2800" b="1" dirty="0">
-                <a:solidFill>
-                  <a:srgbClr val="1E2761"/>
-                </a:solidFill>
-                <a:latin typeface="Cambria" pitchFamily="34" charset="0"/>
-                <a:ea typeface="Cambria" pitchFamily="34" charset="-122"/>
-                <a:cs typeface="Cambria" pitchFamily="34" charset="-120"/>
-              </a:rPr>
-              <a:t>La mitad de la base es prioridad alta, concentrada en el Sur</a:t>
-            </a:r>
-            <a:endParaRPr lang="en-US" sz="2800" dirty="0"/>
+              <a:rPr lang="en-US" sz="3000" b="1" dirty="0">
+                <a:solidFill>
+                  <a:srgbClr val="4A3184"/>
+                </a:solidFill>
+                <a:latin typeface="Calibri" pitchFamily="34" charset="0"/>
+                <a:ea typeface="Calibri" pitchFamily="34" charset="-122"/>
+                <a:cs typeface="Calibri" pitchFamily="34" charset="-120"/>
+              </a:rPr>
+              <a:t>Solo 17 de cada 100 llamadas llegan a una respuesta</a:t>
+            </a:r>
+            <a:endParaRPr lang="en-US" sz="3000" dirty="0"/>
           </a:p>
         </p:txBody>
       </p:sp>
@@ -4632,8 +5890,8 @@
         </p:nvSpPr>
         <p:spPr>
           <a:xfrm>
-            <a:off x="548640" y="2286000"/>
-            <a:ext cx="3291840" cy="868680"/>
+            <a:off x="548640" y="1874520"/>
+            <a:ext cx="1828800" cy="457200"/>
           </a:xfrm>
           <a:prstGeom prst="rect">
             <a:avLst/>
@@ -4645,34 +5903,230 @@
           <a:bodyPr wrap="square" lIns="0" tIns="0" rIns="0" bIns="0" rtlCol="0" anchor="ctr"/>
           <a:lstStyle/>
           <a:p>
+            <a:pPr indent="0" marL="0">
+              <a:buNone/>
+            </a:pPr>
+            <a:r>
+              <a:rPr lang="en-US" sz="2400" b="1" dirty="0">
+                <a:solidFill>
+                  <a:srgbClr val="4A3184"/>
+                </a:solidFill>
+                <a:latin typeface="Calibri" pitchFamily="34" charset="0"/>
+                <a:ea typeface="Calibri" pitchFamily="34" charset="-122"/>
+                <a:cs typeface="Calibri" pitchFamily="34" charset="-120"/>
+              </a:rPr>
+              <a:t>377</a:t>
+            </a:r>
+            <a:endParaRPr lang="en-US" sz="2400" dirty="0"/>
+          </a:p>
+        </p:txBody>
+      </p:sp>
+      <p:sp>
+        <p:nvSpPr>
+          <p:cNvPr id="5" name="Shape 3"/>
+          <p:cNvSpPr/>
+          <p:nvPr/>
+        </p:nvSpPr>
+        <p:spPr>
+          <a:xfrm>
+            <a:off x="548640" y="2377440"/>
+            <a:ext cx="9601200" cy="594360"/>
+          </a:xfrm>
+          <a:prstGeom prst="rect">
+            <a:avLst/>
+          </a:prstGeom>
+          <a:solidFill>
+            <a:srgbClr val="C9BEDD"/>
+          </a:solidFill>
+          <a:ln/>
+        </p:spPr>
+      </p:sp>
+      <p:sp>
+        <p:nvSpPr>
+          <p:cNvPr id="6" name="Text 4"/>
+          <p:cNvSpPr txBox="1"/>
+          <p:nvPr/>
+        </p:nvSpPr>
+        <p:spPr>
+          <a:xfrm>
+            <a:off x="731520" y="2377440"/>
+            <a:ext cx="9144000" cy="594360"/>
+          </a:xfrm>
+          <a:prstGeom prst="rect">
+            <a:avLst/>
+          </a:prstGeom>
+          <a:noFill/>
+          <a:ln/>
+        </p:spPr>
+        <p:txBody>
+          <a:bodyPr wrap="square" lIns="0" tIns="0" rIns="0" bIns="0" rtlCol="0" anchor="ctr"/>
+          <a:lstStyle/>
+          <a:p>
+            <a:pPr indent="0" marL="0">
+              <a:buNone/>
+            </a:pPr>
+            <a:r>
+              <a:rPr lang="en-US" sz="1500" dirty="0">
+                <a:solidFill>
+                  <a:srgbClr val="4A3184"/>
+                </a:solidFill>
+                <a:latin typeface="Calibri" pitchFamily="34" charset="0"/>
+                <a:ea typeface="Calibri" pitchFamily="34" charset="-122"/>
+                <a:cs typeface="Calibri" pitchFamily="34" charset="-120"/>
+              </a:rPr>
+              <a:t>Intentos de llamada</a:t>
+            </a:r>
+            <a:endParaRPr lang="en-US" sz="1500" dirty="0"/>
+          </a:p>
+        </p:txBody>
+      </p:sp>
+      <p:sp>
+        <p:nvSpPr>
+          <p:cNvPr id="7" name="Text 5"/>
+          <p:cNvSpPr txBox="1"/>
+          <p:nvPr/>
+        </p:nvSpPr>
+        <p:spPr>
+          <a:xfrm>
+            <a:off x="548640" y="3246120"/>
+            <a:ext cx="1828800" cy="457200"/>
+          </a:xfrm>
+          <a:prstGeom prst="rect">
+            <a:avLst/>
+          </a:prstGeom>
+          <a:noFill/>
+          <a:ln/>
+        </p:spPr>
+        <p:txBody>
+          <a:bodyPr wrap="square" lIns="0" tIns="0" rIns="0" bIns="0" rtlCol="0" anchor="ctr"/>
+          <a:lstStyle/>
+          <a:p>
+            <a:pPr indent="0" marL="0">
+              <a:buNone/>
+            </a:pPr>
+            <a:r>
+              <a:rPr lang="en-US" sz="2400" b="1" dirty="0">
+                <a:solidFill>
+                  <a:srgbClr val="44C5E3"/>
+                </a:solidFill>
+                <a:latin typeface="Calibri" pitchFamily="34" charset="0"/>
+                <a:ea typeface="Calibri" pitchFamily="34" charset="-122"/>
+                <a:cs typeface="Calibri" pitchFamily="34" charset="-120"/>
+              </a:rPr>
+              <a:t>64</a:t>
+            </a:r>
+            <a:endParaRPr lang="en-US" sz="2400" dirty="0"/>
+          </a:p>
+        </p:txBody>
+      </p:sp>
+      <p:sp>
+        <p:nvSpPr>
+          <p:cNvPr id="8" name="Shape 6"/>
+          <p:cNvSpPr/>
+          <p:nvPr/>
+        </p:nvSpPr>
+        <p:spPr>
+          <a:xfrm>
+            <a:off x="548640" y="3749040"/>
+            <a:ext cx="1636776" cy="594360"/>
+          </a:xfrm>
+          <a:prstGeom prst="rect">
+            <a:avLst/>
+          </a:prstGeom>
+          <a:solidFill>
+            <a:srgbClr val="44C5E3"/>
+          </a:solidFill>
+          <a:ln/>
+        </p:spPr>
+      </p:sp>
+      <p:sp>
+        <p:nvSpPr>
+          <p:cNvPr id="9" name="Text 7"/>
+          <p:cNvSpPr txBox="1"/>
+          <p:nvPr/>
+        </p:nvSpPr>
+        <p:spPr>
+          <a:xfrm>
+            <a:off x="2468880" y="3749040"/>
+            <a:ext cx="4572000" cy="594360"/>
+          </a:xfrm>
+          <a:prstGeom prst="rect">
+            <a:avLst/>
+          </a:prstGeom>
+          <a:noFill/>
+          <a:ln/>
+        </p:spPr>
+        <p:txBody>
+          <a:bodyPr wrap="square" lIns="0" tIns="0" rIns="0" bIns="0" rtlCol="0" anchor="ctr"/>
+          <a:lstStyle/>
+          <a:p>
+            <a:pPr indent="0" marL="0">
+              <a:buNone/>
+            </a:pPr>
+            <a:r>
+              <a:rPr lang="en-US" sz="1500" dirty="0">
+                <a:solidFill>
+                  <a:srgbClr val="32373C"/>
+                </a:solidFill>
+                <a:latin typeface="Calibri" pitchFamily="34" charset="0"/>
+                <a:ea typeface="Calibri" pitchFamily="34" charset="-122"/>
+                <a:cs typeface="Calibri" pitchFamily="34" charset="-120"/>
+              </a:rPr>
+              <a:t>Llamadas efectivas</a:t>
+            </a:r>
+            <a:endParaRPr lang="en-US" sz="1500" dirty="0"/>
+          </a:p>
+        </p:txBody>
+      </p:sp>
+      <p:sp>
+        <p:nvSpPr>
+          <p:cNvPr id="10" name="Text 8"/>
+          <p:cNvSpPr txBox="1"/>
+          <p:nvPr/>
+        </p:nvSpPr>
+        <p:spPr>
+          <a:xfrm>
+            <a:off x="548640" y="4572000"/>
+            <a:ext cx="9144000" cy="731520"/>
+          </a:xfrm>
+          <a:prstGeom prst="rect">
+            <a:avLst/>
+          </a:prstGeom>
+          <a:noFill/>
+          <a:ln/>
+        </p:spPr>
+        <p:txBody>
+          <a:bodyPr wrap="square" lIns="0" tIns="0" rIns="0" bIns="0" rtlCol="0" anchor="ctr"/>
+          <a:lstStyle/>
+          <a:p>
             <a:pPr algn="l" indent="0" marL="0">
               <a:buNone/>
             </a:pPr>
             <a:r>
-              <a:rPr lang="en-US" sz="5000" b="1" dirty="0">
-                <a:solidFill>
-                  <a:srgbClr val="1E2761"/>
-                </a:solidFill>
-                <a:latin typeface="Cambria" pitchFamily="34" charset="0"/>
-                <a:ea typeface="Cambria" pitchFamily="34" charset="-122"/>
-                <a:cs typeface="Cambria" pitchFamily="34" charset="-120"/>
-              </a:rPr>
-              <a:t>50%</a:t>
-            </a:r>
-            <a:endParaRPr lang="en-US" sz="5000" dirty="0"/>
-          </a:p>
-        </p:txBody>
-      </p:sp>
-      <p:sp>
-        <p:nvSpPr>
-          <p:cNvPr id="5" name="Text 3"/>
+              <a:rPr lang="en-US" sz="4000" b="1" dirty="0">
+                <a:solidFill>
+                  <a:srgbClr val="4A3184"/>
+                </a:solidFill>
+                <a:latin typeface="Calibri" pitchFamily="34" charset="0"/>
+                <a:ea typeface="Calibri" pitchFamily="34" charset="-122"/>
+                <a:cs typeface="Calibri" pitchFamily="34" charset="-120"/>
+              </a:rPr>
+              <a:t>17%</a:t>
+            </a:r>
+            <a:endParaRPr lang="en-US" sz="4000" dirty="0"/>
+          </a:p>
+        </p:txBody>
+      </p:sp>
+      <p:sp>
+        <p:nvSpPr>
+          <p:cNvPr id="11" name="Text 9"/>
           <p:cNvSpPr txBox="1"/>
           <p:nvPr/>
         </p:nvSpPr>
         <p:spPr>
           <a:xfrm>
-            <a:off x="548640" y="3154680"/>
-            <a:ext cx="3291840" cy="640080"/>
+            <a:off x="548640" y="5303520"/>
+            <a:ext cx="9144000" cy="777240"/>
           </a:xfrm>
           <a:prstGeom prst="rect">
             <a:avLst/>
@@ -4693,181 +6147,21 @@
             <a:r>
               <a:rPr lang="en-US" sz="1400" dirty="0">
                 <a:solidFill>
-                  <a:srgbClr val="36454F"/>
-                </a:solidFill>
-                <a:latin typeface="Calibri" pitchFamily="34" charset="0"/>
-                <a:ea typeface="Calibri" pitchFamily="34" charset="-122"/>
-                <a:cs typeface="Calibri" pitchFamily="34" charset="-120"/>
-              </a:rPr>
-              <a:t>de las 64 distribuidoras (32) son</a:t>
+                  <a:srgbClr val="32373C"/>
+                </a:solidFill>
+                <a:latin typeface="Calibri" pitchFamily="34" charset="0"/>
+                <a:ea typeface="Calibri" pitchFamily="34" charset="-122"/>
+                <a:cs typeface="Calibri" pitchFamily="34" charset="-120"/>
+              </a:rPr>
+              <a:t>de efectividad de contacto — vale la pena revisar el canal (horarios, números, guion) antes que el contenido.</a:t>
             </a:r>
             <a:endParaRPr lang="en-US" sz="1400" dirty="0"/>
           </a:p>
-          <a:p>
-            <a:pPr algn="l" indent="0" marL="0">
-              <a:lnSpc>
-                <a:spcPct val="110000"/>
-              </a:lnSpc>
-              <a:buNone/>
-            </a:pPr>
-            <a:r>
-              <a:rPr lang="en-US" sz="1400" dirty="0">
-                <a:solidFill>
-                  <a:srgbClr val="36454F"/>
-                </a:solidFill>
-                <a:latin typeface="Calibri" pitchFamily="34" charset="0"/>
-                <a:ea typeface="Calibri" pitchFamily="34" charset="-122"/>
-                <a:cs typeface="Calibri" pitchFamily="34" charset="-120"/>
-              </a:rPr>
-              <a:t>prioridad alta de recontacto</a:t>
-            </a:r>
-            <a:endParaRPr lang="en-US" sz="1400" dirty="0"/>
-          </a:p>
-        </p:txBody>
-      </p:sp>
-      <p:sp>
-        <p:nvSpPr>
-          <p:cNvPr id="6" name="Shape 4"/>
-          <p:cNvSpPr/>
-          <p:nvPr/>
-        </p:nvSpPr>
-        <p:spPr>
-          <a:xfrm>
-            <a:off x="548640" y="3794760"/>
-            <a:ext cx="3291840" cy="0"/>
-          </a:xfrm>
-          <a:prstGeom prst="line">
-            <a:avLst/>
-          </a:prstGeom>
-          <a:noFill/>
-          <a:ln w="12700">
-            <a:solidFill>
-              <a:srgbClr val="E2E5F1"/>
-            </a:solidFill>
-            <a:prstDash val="solid"/>
-          </a:ln>
-        </p:spPr>
-      </p:sp>
-      <p:sp>
-        <p:nvSpPr>
-          <p:cNvPr id="7" name="Text 5"/>
-          <p:cNvSpPr txBox="1"/>
-          <p:nvPr/>
-        </p:nvSpPr>
-        <p:spPr>
-          <a:xfrm>
-            <a:off x="548640" y="4069080"/>
-            <a:ext cx="3291840" cy="868680"/>
-          </a:xfrm>
-          <a:prstGeom prst="rect">
-            <a:avLst/>
-          </a:prstGeom>
-          <a:noFill/>
-          <a:ln/>
-        </p:spPr>
-        <p:txBody>
-          <a:bodyPr wrap="square" lIns="0" tIns="0" rIns="0" bIns="0" rtlCol="0" anchor="ctr"/>
-          <a:lstStyle/>
-          <a:p>
-            <a:pPr algn="l" indent="0" marL="0">
-              <a:buNone/>
-            </a:pPr>
-            <a:r>
-              <a:rPr lang="en-US" sz="5000" b="1" dirty="0">
-                <a:solidFill>
-                  <a:srgbClr val="F96167"/>
-                </a:solidFill>
-                <a:latin typeface="Cambria" pitchFamily="34" charset="0"/>
-                <a:ea typeface="Cambria" pitchFamily="34" charset="-122"/>
-                <a:cs typeface="Cambria" pitchFamily="34" charset="-120"/>
-              </a:rPr>
-              <a:t>47%</a:t>
-            </a:r>
-            <a:endParaRPr lang="en-US" sz="5000" dirty="0"/>
-          </a:p>
-        </p:txBody>
-      </p:sp>
-      <p:sp>
-        <p:nvSpPr>
-          <p:cNvPr id="8" name="Text 6"/>
-          <p:cNvSpPr txBox="1"/>
-          <p:nvPr/>
-        </p:nvSpPr>
-        <p:spPr>
-          <a:xfrm>
-            <a:off x="548640" y="4937760"/>
-            <a:ext cx="3291840" cy="640080"/>
-          </a:xfrm>
-          <a:prstGeom prst="rect">
-            <a:avLst/>
-          </a:prstGeom>
-          <a:noFill/>
-          <a:ln/>
-        </p:spPr>
-        <p:txBody>
-          <a:bodyPr wrap="square" lIns="0" tIns="0" rIns="0" bIns="0" rtlCol="0" anchor="ctr"/>
-          <a:lstStyle/>
-          <a:p>
-            <a:pPr algn="l" indent="0" marL="0">
-              <a:lnSpc>
-                <a:spcPct val="110000"/>
-              </a:lnSpc>
-              <a:buNone/>
-            </a:pPr>
-            <a:r>
-              <a:rPr lang="en-US" sz="1400" dirty="0">
-                <a:solidFill>
-                  <a:srgbClr val="36454F"/>
-                </a:solidFill>
-                <a:latin typeface="Calibri" pitchFamily="34" charset="0"/>
-                <a:ea typeface="Calibri" pitchFamily="34" charset="-122"/>
-                <a:cs typeface="Calibri" pitchFamily="34" charset="-120"/>
-              </a:rPr>
-              <a:t>de la prioridad alta (15 de 32)</a:t>
-            </a:r>
-            <a:endParaRPr lang="en-US" sz="1400" dirty="0"/>
-          </a:p>
-          <a:p>
-            <a:pPr algn="l" indent="0" marL="0">
-              <a:lnSpc>
-                <a:spcPct val="110000"/>
-              </a:lnSpc>
-              <a:buNone/>
-            </a:pPr>
-            <a:r>
-              <a:rPr lang="en-US" sz="1400" dirty="0">
-                <a:solidFill>
-                  <a:srgbClr val="36454F"/>
-                </a:solidFill>
-                <a:latin typeface="Calibri" pitchFamily="34" charset="0"/>
-                <a:ea typeface="Calibri" pitchFamily="34" charset="-122"/>
-                <a:cs typeface="Calibri" pitchFamily="34" charset="-120"/>
-              </a:rPr>
-              <a:t>se concentra en la región Sur</a:t>
-            </a:r>
-            <a:endParaRPr lang="en-US" sz="1400" dirty="0"/>
-          </a:p>
-        </p:txBody>
-      </p:sp>
-      <p:graphicFrame>
-        <p:nvGraphicFramePr>
-          <p:cNvPr id="9" name="Chart 0" descr=""/>
-          <p:cNvGraphicFramePr/>
-          <p:nvPr/>
-        </p:nvGraphicFramePr>
-        <p:xfrm>
-          <a:off x="4846320" y="1737360"/>
-          <a:ext cx="6766560" cy="4206240"/>
-        </p:xfrm>
-        <a:graphic xmlns:a="http://schemas.openxmlformats.org/drawingml/2006/main">
-          <a:graphicData uri="http://schemas.openxmlformats.org/drawingml/2006/chart">
-            <c:chart xmlns:c="http://schemas.openxmlformats.org/drawingml/2006/chart" r:id="rId1"/>
-          </a:graphicData>
-        </a:graphic>
-      </p:graphicFrame>
-      <p:sp>
-        <p:nvSpPr>
-          <p:cNvPr id="10" name="Text 7"/>
+        </p:txBody>
+      </p:sp>
+      <p:sp>
+        <p:nvSpPr>
+          <p:cNvPr id="12" name="Text 10"/>
           <p:cNvSpPr txBox="1"/>
           <p:nvPr/>
         </p:nvSpPr>
@@ -4892,7 +6186,7 @@
             <a:r>
               <a:rPr lang="en-US" sz="1000" dirty="0">
                 <a:solidFill>
-                  <a:srgbClr val="8892B0"/>
+                  <a:srgbClr val="9A93B5"/>
                 </a:solidFill>
                 <a:latin typeface="Calibri" pitchFamily="34" charset="0"/>
                 <a:ea typeface="Calibri" pitchFamily="34" charset="-122"/>
@@ -4906,7 +6200,7 @@
       </p:sp>
       <p:sp>
         <p:nvSpPr>
-          <p:cNvPr id="11" name="Text 8"/>
+          <p:cNvPr id="13" name="Text 11"/>
           <p:cNvSpPr txBox="1"/>
           <p:nvPr/>
         </p:nvSpPr>
@@ -4931,7 +6225,7 @@
             <a:r>
               <a:rPr lang="en-US" sz="1000" dirty="0">
                 <a:solidFill>
-                  <a:srgbClr val="8892B0"/>
+                  <a:srgbClr val="9A93B5"/>
                 </a:solidFill>
                 <a:latin typeface="Calibri" pitchFamily="34" charset="0"/>
                 <a:ea typeface="Calibri" pitchFamily="34" charset="-122"/>
@@ -4984,7 +6278,7 @@
         <p:spPr>
           <a:xfrm>
             <a:off x="548640" y="457200"/>
-            <a:ext cx="10972800" cy="457200"/>
+            <a:ext cx="10972800" cy="411480"/>
           </a:xfrm>
           <a:prstGeom prst="rect">
             <a:avLst/>
@@ -5000,15 +6294,15 @@
               <a:buNone/>
             </a:pPr>
             <a:r>
-              <a:rPr lang="en-US" sz="1400" b="1" spc="200" kern="0" dirty="0">
-                <a:solidFill>
-                  <a:srgbClr val="F96167"/>
-                </a:solidFill>
-                <a:latin typeface="Calibri" pitchFamily="34" charset="0"/>
-                <a:ea typeface="Calibri" pitchFamily="34" charset="-122"/>
-                <a:cs typeface="Calibri" pitchFamily="34" charset="-120"/>
-              </a:rPr>
-              <a:t>QUÉ HACER CON ESTO</a:t>
+              <a:rPr lang="en-US" sz="1400" b="1" spc="150" kern="0" dirty="0">
+                <a:solidFill>
+                  <a:srgbClr val="44C5E3"/>
+                </a:solidFill>
+                <a:latin typeface="Calibri" pitchFamily="34" charset="0"/>
+                <a:ea typeface="Calibri" pitchFamily="34" charset="-122"/>
+                <a:cs typeface="Calibri" pitchFamily="34" charset="-120"/>
+              </a:rPr>
+              <a:t>05  ·  YA SABEMOS POR DÓNDE EMPEZAR</a:t>
             </a:r>
             <a:endParaRPr lang="en-US" sz="1400" dirty="0"/>
           </a:p>
@@ -5023,7 +6317,7 @@
         <p:spPr>
           <a:xfrm>
             <a:off x="548640" y="868680"/>
-            <a:ext cx="10058400" cy="731520"/>
+            <a:ext cx="10789920" cy="822960"/>
           </a:xfrm>
           <a:prstGeom prst="rect">
             <a:avLst/>
@@ -5039,100 +6333,143 @@
               <a:buNone/>
             </a:pPr>
             <a:r>
-              <a:rPr lang="en-US" sz="3200" b="1" dirty="0">
-                <a:solidFill>
-                  <a:srgbClr val="1E2761"/>
-                </a:solidFill>
-                <a:latin typeface="Cambria" pitchFamily="34" charset="0"/>
-                <a:ea typeface="Cambria" pitchFamily="34" charset="-122"/>
-                <a:cs typeface="Cambria" pitchFamily="34" charset="-120"/>
-              </a:rPr>
-              <a:t>Cuatro acciones concretas</a:t>
-            </a:r>
-            <a:endParaRPr lang="en-US" sz="3200" dirty="0"/>
-          </a:p>
-        </p:txBody>
-      </p:sp>
-      <p:sp>
-        <p:nvSpPr>
-          <p:cNvPr id="4" name="Shape 2"/>
+              <a:rPr lang="en-US" sz="2800" b="1" dirty="0">
+                <a:solidFill>
+                  <a:srgbClr val="4A3184"/>
+                </a:solidFill>
+                <a:latin typeface="Calibri" pitchFamily="34" charset="0"/>
+                <a:ea typeface="Calibri" pitchFamily="34" charset="-122"/>
+                <a:cs typeface="Calibri" pitchFamily="34" charset="-120"/>
+              </a:rPr>
+              <a:t>La mitad de la base es prioridad alta, concentrada en el Sur</a:t>
+            </a:r>
+            <a:endParaRPr lang="en-US" sz="2800" dirty="0"/>
+          </a:p>
+        </p:txBody>
+      </p:sp>
+      <p:sp>
+        <p:nvSpPr>
+          <p:cNvPr id="4" name="Text 2"/>
+          <p:cNvSpPr txBox="1"/>
+          <p:nvPr/>
+        </p:nvSpPr>
+        <p:spPr>
+          <a:xfrm>
+            <a:off x="548640" y="2286000"/>
+            <a:ext cx="3291840" cy="868680"/>
+          </a:xfrm>
+          <a:prstGeom prst="rect">
+            <a:avLst/>
+          </a:prstGeom>
+          <a:noFill/>
+          <a:ln/>
+        </p:spPr>
+        <p:txBody>
+          <a:bodyPr wrap="square" lIns="0" tIns="0" rIns="0" bIns="0" rtlCol="0" anchor="ctr"/>
+          <a:lstStyle/>
+          <a:p>
+            <a:pPr algn="l" indent="0" marL="0">
+              <a:buNone/>
+            </a:pPr>
+            <a:r>
+              <a:rPr lang="en-US" sz="5000" b="1" dirty="0">
+                <a:solidFill>
+                  <a:srgbClr val="4A3184"/>
+                </a:solidFill>
+                <a:latin typeface="Calibri" pitchFamily="34" charset="0"/>
+                <a:ea typeface="Calibri" pitchFamily="34" charset="-122"/>
+                <a:cs typeface="Calibri" pitchFamily="34" charset="-120"/>
+              </a:rPr>
+              <a:t>50%</a:t>
+            </a:r>
+            <a:endParaRPr lang="en-US" sz="5000" dirty="0"/>
+          </a:p>
+        </p:txBody>
+      </p:sp>
+      <p:sp>
+        <p:nvSpPr>
+          <p:cNvPr id="5" name="Text 3"/>
+          <p:cNvSpPr txBox="1"/>
+          <p:nvPr/>
+        </p:nvSpPr>
+        <p:spPr>
+          <a:xfrm>
+            <a:off x="548640" y="3154680"/>
+            <a:ext cx="3291840" cy="640080"/>
+          </a:xfrm>
+          <a:prstGeom prst="rect">
+            <a:avLst/>
+          </a:prstGeom>
+          <a:noFill/>
+          <a:ln/>
+        </p:spPr>
+        <p:txBody>
+          <a:bodyPr wrap="square" lIns="0" tIns="0" rIns="0" bIns="0" rtlCol="0" anchor="ctr"/>
+          <a:lstStyle/>
+          <a:p>
+            <a:pPr algn="l" indent="0" marL="0">
+              <a:lnSpc>
+                <a:spcPct val="110000"/>
+              </a:lnSpc>
+              <a:buNone/>
+            </a:pPr>
+            <a:r>
+              <a:rPr lang="en-US" sz="1400" dirty="0">
+                <a:solidFill>
+                  <a:srgbClr val="32373C"/>
+                </a:solidFill>
+                <a:latin typeface="Calibri" pitchFamily="34" charset="0"/>
+                <a:ea typeface="Calibri" pitchFamily="34" charset="-122"/>
+                <a:cs typeface="Calibri" pitchFamily="34" charset="-120"/>
+              </a:rPr>
+              <a:t>de las 64 distribuidoras (32) son</a:t>
+            </a:r>
+            <a:endParaRPr lang="en-US" sz="1400" dirty="0"/>
+          </a:p>
+          <a:p>
+            <a:pPr algn="l" indent="0" marL="0">
+              <a:lnSpc>
+                <a:spcPct val="110000"/>
+              </a:lnSpc>
+              <a:buNone/>
+            </a:pPr>
+            <a:r>
+              <a:rPr lang="en-US" sz="1400" dirty="0">
+                <a:solidFill>
+                  <a:srgbClr val="32373C"/>
+                </a:solidFill>
+                <a:latin typeface="Calibri" pitchFamily="34" charset="0"/>
+                <a:ea typeface="Calibri" pitchFamily="34" charset="-122"/>
+                <a:cs typeface="Calibri" pitchFamily="34" charset="-120"/>
+              </a:rPr>
+              <a:t>prioridad alta de recontacto</a:t>
+            </a:r>
+            <a:endParaRPr lang="en-US" sz="1400" dirty="0"/>
+          </a:p>
+        </p:txBody>
+      </p:sp>
+      <p:sp>
+        <p:nvSpPr>
+          <p:cNvPr id="6" name="Shape 4"/>
           <p:cNvSpPr/>
           <p:nvPr/>
         </p:nvSpPr>
         <p:spPr>
           <a:xfrm>
-            <a:off x="548640" y="1920240"/>
-            <a:ext cx="5349240" cy="2148840"/>
-          </a:xfrm>
-          <a:prstGeom prst="roundRect">
-            <a:avLst>
-              <a:gd name="adj" fmla="val 5106"/>
-            </a:avLst>
-          </a:prstGeom>
-          <a:solidFill>
-            <a:srgbClr val="F7F8FC"/>
-          </a:solidFill>
-          <a:ln/>
-        </p:spPr>
-      </p:sp>
-      <p:sp>
-        <p:nvSpPr>
-          <p:cNvPr id="5" name="Shape 3"/>
-          <p:cNvSpPr/>
-          <p:nvPr/>
-        </p:nvSpPr>
-        <p:spPr>
-          <a:xfrm>
-            <a:off x="868680" y="2240280"/>
-            <a:ext cx="594360" cy="594360"/>
-          </a:xfrm>
-          <a:prstGeom prst="ellipse">
-            <a:avLst/>
-          </a:prstGeom>
-          <a:solidFill>
-            <a:srgbClr val="1E2761"/>
-          </a:solidFill>
-          <a:ln/>
-        </p:spPr>
-      </p:sp>
-      <p:sp>
-        <p:nvSpPr>
-          <p:cNvPr id="6" name="Text 4"/>
-          <p:cNvSpPr txBox="1"/>
-          <p:nvPr/>
-        </p:nvSpPr>
-        <p:spPr>
-          <a:xfrm>
-            <a:off x="868680" y="2240280"/>
-            <a:ext cx="594360" cy="594360"/>
-          </a:xfrm>
-          <a:prstGeom prst="rect">
-            <a:avLst/>
-          </a:prstGeom>
-          <a:noFill/>
-          <a:ln/>
-        </p:spPr>
-        <p:txBody>
-          <a:bodyPr wrap="square" lIns="0" tIns="0" rIns="0" bIns="0" rtlCol="0" anchor="ctr"/>
-          <a:lstStyle/>
-          <a:p>
-            <a:pPr algn="ctr" indent="0" marL="0">
-              <a:buNone/>
-            </a:pPr>
-            <a:r>
-              <a:rPr lang="en-US" sz="2200" b="1" dirty="0">
-                <a:solidFill>
-                  <a:srgbClr val="FFFFFF"/>
-                </a:solidFill>
-                <a:latin typeface="Cambria" pitchFamily="34" charset="0"/>
-                <a:ea typeface="Cambria" pitchFamily="34" charset="-122"/>
-                <a:cs typeface="Cambria" pitchFamily="34" charset="-120"/>
-              </a:rPr>
-              <a:t>1</a:t>
-            </a:r>
-            <a:endParaRPr lang="en-US" sz="2200" dirty="0"/>
-          </a:p>
-        </p:txBody>
+            <a:off x="548640" y="3794760"/>
+            <a:ext cx="3291840" cy="0"/>
+          </a:xfrm>
+          <a:prstGeom prst="line">
+            <a:avLst/>
+          </a:prstGeom>
+          <a:noFill/>
+          <a:ln w="12700">
+            <a:solidFill>
+              <a:srgbClr val="E9E6F2"/>
+            </a:solidFill>
+            <a:prstDash val="solid"/>
+          </a:ln>
+        </p:spPr>
       </p:sp>
       <p:sp>
         <p:nvSpPr>
@@ -5142,8 +6479,8 @@
         </p:nvSpPr>
         <p:spPr>
           <a:xfrm>
-            <a:off x="1645920" y="2194560"/>
-            <a:ext cx="3977640" cy="457200"/>
+            <a:off x="548640" y="4069080"/>
+            <a:ext cx="3291840" cy="868680"/>
           </a:xfrm>
           <a:prstGeom prst="rect">
             <a:avLst/>
@@ -5155,21 +6492,21 @@
           <a:bodyPr wrap="square" lIns="0" tIns="0" rIns="0" bIns="0" rtlCol="0" anchor="ctr"/>
           <a:lstStyle/>
           <a:p>
-            <a:pPr indent="0" marL="0">
-              <a:buNone/>
-            </a:pPr>
-            <a:r>
-              <a:rPr lang="en-US" sz="1800" b="1" dirty="0">
-                <a:solidFill>
-                  <a:srgbClr val="1E2761"/>
-                </a:solidFill>
-                <a:latin typeface="Calibri" pitchFamily="34" charset="0"/>
-                <a:ea typeface="Calibri" pitchFamily="34" charset="-122"/>
-                <a:cs typeface="Calibri" pitchFamily="34" charset="-120"/>
-              </a:rPr>
-              <a:t>Recuperar clientes</a:t>
-            </a:r>
-            <a:endParaRPr lang="en-US" sz="1800" dirty="0"/>
+            <a:pPr algn="l" indent="0" marL="0">
+              <a:buNone/>
+            </a:pPr>
+            <a:r>
+              <a:rPr lang="en-US" sz="5000" b="1" dirty="0">
+                <a:solidFill>
+                  <a:srgbClr val="44C5E3"/>
+                </a:solidFill>
+                <a:latin typeface="Calibri" pitchFamily="34" charset="0"/>
+                <a:ea typeface="Calibri" pitchFamily="34" charset="-122"/>
+                <a:cs typeface="Calibri" pitchFamily="34" charset="-120"/>
+              </a:rPr>
+              <a:t>47%</a:t>
+            </a:r>
+            <a:endParaRPr lang="en-US" sz="5000" dirty="0"/>
           </a:p>
         </p:txBody>
       </p:sp>
@@ -5181,8 +6518,8 @@
         </p:nvSpPr>
         <p:spPr>
           <a:xfrm>
-            <a:off x="868680" y="2971800"/>
-            <a:ext cx="4709160" cy="914400"/>
+            <a:off x="548640" y="4937760"/>
+            <a:ext cx="3291840" cy="640080"/>
           </a:xfrm>
           <a:prstGeom prst="rect">
             <a:avLst/>
@@ -5194,516 +6531,66 @@
           <a:bodyPr wrap="square" lIns="0" tIns="0" rIns="0" bIns="0" rtlCol="0" anchor="ctr"/>
           <a:lstStyle/>
           <a:p>
-            <a:pPr indent="0" marL="0">
+            <a:pPr algn="l" indent="0" marL="0">
               <a:lnSpc>
-                <a:spcPct val="115000"/>
+                <a:spcPct val="110000"/>
               </a:lnSpc>
               <a:buNone/>
             </a:pPr>
             <a:r>
-              <a:rPr lang="en-US" sz="1300" dirty="0">
-                <a:solidFill>
-                  <a:srgbClr val="36454F"/>
-                </a:solidFill>
-                <a:latin typeface="Calibri" pitchFamily="34" charset="0"/>
-                <a:ea typeface="Calibri" pitchFamily="34" charset="-122"/>
-                <a:cs typeface="Calibri" pitchFamily="34" charset="-120"/>
-              </a:rPr>
-              <a:t>Acompañamiento comercial enfocado en conseguir clientela propia — la barrera #1 en P1.</a:t>
-            </a:r>
-            <a:endParaRPr lang="en-US" sz="1300" dirty="0"/>
-          </a:p>
-        </p:txBody>
-      </p:sp>
-      <p:sp>
-        <p:nvSpPr>
-          <p:cNvPr id="9" name="Shape 7"/>
-          <p:cNvSpPr/>
-          <p:nvPr/>
-        </p:nvSpPr>
-        <p:spPr>
-          <a:xfrm>
-            <a:off x="6217920" y="1920240"/>
-            <a:ext cx="5349240" cy="2148840"/>
-          </a:xfrm>
-          <a:prstGeom prst="roundRect">
-            <a:avLst>
-              <a:gd name="adj" fmla="val 5106"/>
-            </a:avLst>
-          </a:prstGeom>
-          <a:solidFill>
-            <a:srgbClr val="F7F8FC"/>
-          </a:solidFill>
-          <a:ln/>
-        </p:spPr>
-      </p:sp>
-      <p:sp>
-        <p:nvSpPr>
-          <p:cNvPr id="10" name="Shape 8"/>
-          <p:cNvSpPr/>
-          <p:nvPr/>
-        </p:nvSpPr>
-        <p:spPr>
-          <a:xfrm>
-            <a:off x="6537960" y="2240280"/>
-            <a:ext cx="594360" cy="594360"/>
-          </a:xfrm>
-          <a:prstGeom prst="ellipse">
-            <a:avLst/>
-          </a:prstGeom>
-          <a:solidFill>
-            <a:srgbClr val="1E2761"/>
-          </a:solidFill>
-          <a:ln/>
-        </p:spPr>
-      </p:sp>
-      <p:sp>
-        <p:nvSpPr>
-          <p:cNvPr id="11" name="Text 9"/>
-          <p:cNvSpPr txBox="1"/>
-          <p:nvPr/>
-        </p:nvSpPr>
-        <p:spPr>
-          <a:xfrm>
-            <a:off x="6537960" y="2240280"/>
-            <a:ext cx="594360" cy="594360"/>
-          </a:xfrm>
-          <a:prstGeom prst="rect">
-            <a:avLst/>
-          </a:prstGeom>
-          <a:noFill/>
-          <a:ln/>
-        </p:spPr>
-        <p:txBody>
-          <a:bodyPr wrap="square" lIns="0" tIns="0" rIns="0" bIns="0" rtlCol="0" anchor="ctr"/>
-          <a:lstStyle/>
-          <a:p>
-            <a:pPr algn="ctr" indent="0" marL="0">
-              <a:buNone/>
-            </a:pPr>
-            <a:r>
-              <a:rPr lang="en-US" sz="2200" b="1" dirty="0">
-                <a:solidFill>
-                  <a:srgbClr val="FFFFFF"/>
-                </a:solidFill>
-                <a:latin typeface="Cambria" pitchFamily="34" charset="0"/>
-                <a:ea typeface="Cambria" pitchFamily="34" charset="-122"/>
-                <a:cs typeface="Cambria" pitchFamily="34" charset="-120"/>
-              </a:rPr>
-              <a:t>2</a:t>
-            </a:r>
-            <a:endParaRPr lang="en-US" sz="2200" dirty="0"/>
-          </a:p>
-        </p:txBody>
-      </p:sp>
-      <p:sp>
-        <p:nvSpPr>
-          <p:cNvPr id="12" name="Text 10"/>
-          <p:cNvSpPr txBox="1"/>
-          <p:nvPr/>
-        </p:nvSpPr>
-        <p:spPr>
-          <a:xfrm>
-            <a:off x="7315200" y="2194560"/>
-            <a:ext cx="3977640" cy="457200"/>
-          </a:xfrm>
-          <a:prstGeom prst="rect">
-            <a:avLst/>
-          </a:prstGeom>
-          <a:noFill/>
-          <a:ln/>
-        </p:spPr>
-        <p:txBody>
-          <a:bodyPr wrap="square" lIns="0" tIns="0" rIns="0" bIns="0" rtlCol="0" anchor="ctr"/>
-          <a:lstStyle/>
-          <a:p>
-            <a:pPr indent="0" marL="0">
-              <a:buNone/>
-            </a:pPr>
-            <a:r>
-              <a:rPr lang="en-US" sz="1800" b="1" dirty="0">
-                <a:solidFill>
-                  <a:srgbClr val="1E2761"/>
-                </a:solidFill>
-                <a:latin typeface="Calibri" pitchFamily="34" charset="0"/>
-                <a:ea typeface="Calibri" pitchFamily="34" charset="-122"/>
-                <a:cs typeface="Calibri" pitchFamily="34" charset="-120"/>
-              </a:rPr>
-              <a:t>Igualar condiciones</a:t>
-            </a:r>
-            <a:endParaRPr lang="en-US" sz="1800" dirty="0"/>
-          </a:p>
-        </p:txBody>
-      </p:sp>
-      <p:sp>
-        <p:nvSpPr>
-          <p:cNvPr id="13" name="Text 11"/>
-          <p:cNvSpPr txBox="1"/>
-          <p:nvPr/>
-        </p:nvSpPr>
-        <p:spPr>
-          <a:xfrm>
-            <a:off x="6537960" y="2971800"/>
-            <a:ext cx="4709160" cy="914400"/>
-          </a:xfrm>
-          <a:prstGeom prst="rect">
-            <a:avLst/>
-          </a:prstGeom>
-          <a:noFill/>
-          <a:ln/>
-        </p:spPr>
-        <p:txBody>
-          <a:bodyPr wrap="square" lIns="0" tIns="0" rIns="0" bIns="0" rtlCol="0" anchor="ctr"/>
-          <a:lstStyle/>
-          <a:p>
-            <a:pPr indent="0" marL="0">
+              <a:rPr lang="en-US" sz="1400" dirty="0">
+                <a:solidFill>
+                  <a:srgbClr val="32373C"/>
+                </a:solidFill>
+                <a:latin typeface="Calibri" pitchFamily="34" charset="0"/>
+                <a:ea typeface="Calibri" pitchFamily="34" charset="-122"/>
+                <a:cs typeface="Calibri" pitchFamily="34" charset="-120"/>
+              </a:rPr>
+              <a:t>de la prioridad alta (15 de 32)</a:t>
+            </a:r>
+            <a:endParaRPr lang="en-US" sz="1400" dirty="0"/>
+          </a:p>
+          <a:p>
+            <a:pPr algn="l" indent="0" marL="0">
               <a:lnSpc>
-                <a:spcPct val="115000"/>
+                <a:spcPct val="110000"/>
               </a:lnSpc>
               <a:buNone/>
             </a:pPr>
             <a:r>
-              <a:rPr lang="en-US" sz="1300" dirty="0">
-                <a:solidFill>
-                  <a:srgbClr val="36454F"/>
-                </a:solidFill>
-                <a:latin typeface="Calibri" pitchFamily="34" charset="0"/>
-                <a:ea typeface="Calibri" pitchFamily="34" charset="-122"/>
-                <a:cs typeface="Calibri" pitchFamily="34" charset="-120"/>
-              </a:rPr>
-              <a:t>Revisar plazos, días de pago, comisiones y vales digitales frente a lo que ofrece la competencia.</a:t>
-            </a:r>
-            <a:endParaRPr lang="en-US" sz="1300" dirty="0"/>
-          </a:p>
-        </p:txBody>
-      </p:sp>
-      <p:sp>
-        <p:nvSpPr>
-          <p:cNvPr id="14" name="Shape 12"/>
-          <p:cNvSpPr/>
-          <p:nvPr/>
-        </p:nvSpPr>
-        <p:spPr>
-          <a:xfrm>
-            <a:off x="548640" y="4343400"/>
-            <a:ext cx="5349240" cy="2148840"/>
-          </a:xfrm>
-          <a:prstGeom prst="roundRect">
-            <a:avLst>
-              <a:gd name="adj" fmla="val 5106"/>
-            </a:avLst>
-          </a:prstGeom>
-          <a:solidFill>
-            <a:srgbClr val="F7F8FC"/>
-          </a:solidFill>
-          <a:ln/>
-        </p:spPr>
-      </p:sp>
-      <p:sp>
-        <p:nvSpPr>
-          <p:cNvPr id="15" name="Shape 13"/>
-          <p:cNvSpPr/>
-          <p:nvPr/>
-        </p:nvSpPr>
-        <p:spPr>
-          <a:xfrm>
-            <a:off x="868680" y="4663440"/>
-            <a:ext cx="594360" cy="594360"/>
-          </a:xfrm>
-          <a:prstGeom prst="ellipse">
-            <a:avLst/>
-          </a:prstGeom>
-          <a:solidFill>
-            <a:srgbClr val="1E2761"/>
-          </a:solidFill>
-          <a:ln/>
-        </p:spPr>
-      </p:sp>
-      <p:sp>
-        <p:nvSpPr>
-          <p:cNvPr id="16" name="Text 14"/>
-          <p:cNvSpPr txBox="1"/>
-          <p:nvPr/>
-        </p:nvSpPr>
-        <p:spPr>
-          <a:xfrm>
-            <a:off x="868680" y="4663440"/>
-            <a:ext cx="594360" cy="594360"/>
-          </a:xfrm>
-          <a:prstGeom prst="rect">
-            <a:avLst/>
-          </a:prstGeom>
-          <a:noFill/>
-          <a:ln/>
-        </p:spPr>
-        <p:txBody>
-          <a:bodyPr wrap="square" lIns="0" tIns="0" rIns="0" bIns="0" rtlCol="0" anchor="ctr"/>
-          <a:lstStyle/>
-          <a:p>
-            <a:pPr algn="ctr" indent="0" marL="0">
-              <a:buNone/>
-            </a:pPr>
-            <a:r>
-              <a:rPr lang="en-US" sz="2200" b="1" dirty="0">
-                <a:solidFill>
-                  <a:srgbClr val="FFFFFF"/>
-                </a:solidFill>
-                <a:latin typeface="Cambria" pitchFamily="34" charset="0"/>
-                <a:ea typeface="Cambria" pitchFamily="34" charset="-122"/>
-                <a:cs typeface="Cambria" pitchFamily="34" charset="-120"/>
-              </a:rPr>
-              <a:t>3</a:t>
-            </a:r>
-            <a:endParaRPr lang="en-US" sz="2200" dirty="0"/>
-          </a:p>
-        </p:txBody>
-      </p:sp>
-      <p:sp>
-        <p:nvSpPr>
-          <p:cNvPr id="17" name="Text 15"/>
-          <p:cNvSpPr txBox="1"/>
-          <p:nvPr/>
-        </p:nvSpPr>
-        <p:spPr>
-          <a:xfrm>
-            <a:off x="1645920" y="4617720"/>
-            <a:ext cx="3977640" cy="457200"/>
-          </a:xfrm>
-          <a:prstGeom prst="rect">
-            <a:avLst/>
-          </a:prstGeom>
-          <a:noFill/>
-          <a:ln/>
-        </p:spPr>
-        <p:txBody>
-          <a:bodyPr wrap="square" lIns="0" tIns="0" rIns="0" bIns="0" rtlCol="0" anchor="ctr"/>
-          <a:lstStyle/>
-          <a:p>
-            <a:pPr indent="0" marL="0">
-              <a:buNone/>
-            </a:pPr>
-            <a:r>
-              <a:rPr lang="en-US" sz="1800" b="1" dirty="0">
-                <a:solidFill>
-                  <a:srgbClr val="1E2761"/>
-                </a:solidFill>
-                <a:latin typeface="Calibri" pitchFamily="34" charset="0"/>
-                <a:ea typeface="Calibri" pitchFamily="34" charset="-122"/>
-                <a:cs typeface="Calibri" pitchFamily="34" charset="-120"/>
-              </a:rPr>
-              <a:t>Reforzar soporte</a:t>
-            </a:r>
-            <a:endParaRPr lang="en-US" sz="1800" dirty="0"/>
-          </a:p>
-        </p:txBody>
-      </p:sp>
-      <p:sp>
-        <p:nvSpPr>
-          <p:cNvPr id="18" name="Text 16"/>
-          <p:cNvSpPr txBox="1"/>
-          <p:nvPr/>
-        </p:nvSpPr>
-        <p:spPr>
-          <a:xfrm>
-            <a:off x="868680" y="5394960"/>
-            <a:ext cx="4709160" cy="914400"/>
-          </a:xfrm>
-          <a:prstGeom prst="rect">
-            <a:avLst/>
-          </a:prstGeom>
-          <a:noFill/>
-          <a:ln/>
-        </p:spPr>
-        <p:txBody>
-          <a:bodyPr wrap="square" lIns="0" tIns="0" rIns="0" bIns="0" rtlCol="0" anchor="ctr"/>
-          <a:lstStyle/>
-          <a:p>
-            <a:pPr indent="0" marL="0">
-              <a:lnSpc>
-                <a:spcPct val="115000"/>
-              </a:lnSpc>
-              <a:buNone/>
-            </a:pPr>
-            <a:r>
-              <a:rPr lang="en-US" sz="1300" dirty="0">
-                <a:solidFill>
-                  <a:srgbClr val="36454F"/>
-                </a:solidFill>
-                <a:latin typeface="Calibri" pitchFamily="34" charset="0"/>
-                <a:ea typeface="Calibri" pitchFamily="34" charset="-122"/>
-                <a:cs typeface="Calibri" pitchFamily="34" charset="-120"/>
-              </a:rPr>
-              <a:t>Más presencia de gestoría, cobranza y seguimiento de coordinadores — el reclamo más citado.</a:t>
-            </a:r>
-            <a:endParaRPr lang="en-US" sz="1300" dirty="0"/>
-          </a:p>
-        </p:txBody>
-      </p:sp>
-      <p:sp>
-        <p:nvSpPr>
-          <p:cNvPr id="19" name="Shape 17"/>
-          <p:cNvSpPr/>
-          <p:nvPr/>
-        </p:nvSpPr>
-        <p:spPr>
-          <a:xfrm>
-            <a:off x="6217920" y="4343400"/>
-            <a:ext cx="5349240" cy="2148840"/>
-          </a:xfrm>
-          <a:prstGeom prst="roundRect">
-            <a:avLst>
-              <a:gd name="adj" fmla="val 5106"/>
-            </a:avLst>
-          </a:prstGeom>
-          <a:solidFill>
-            <a:srgbClr val="F7F8FC"/>
-          </a:solidFill>
-          <a:ln/>
-        </p:spPr>
-      </p:sp>
-      <p:sp>
-        <p:nvSpPr>
-          <p:cNvPr id="20" name="Shape 18"/>
-          <p:cNvSpPr/>
-          <p:nvPr/>
-        </p:nvSpPr>
-        <p:spPr>
-          <a:xfrm>
-            <a:off x="6537960" y="4663440"/>
-            <a:ext cx="594360" cy="594360"/>
-          </a:xfrm>
-          <a:prstGeom prst="ellipse">
-            <a:avLst/>
-          </a:prstGeom>
-          <a:solidFill>
-            <a:srgbClr val="1E2761"/>
-          </a:solidFill>
-          <a:ln/>
-        </p:spPr>
-      </p:sp>
-      <p:sp>
-        <p:nvSpPr>
-          <p:cNvPr id="21" name="Text 19"/>
-          <p:cNvSpPr txBox="1"/>
-          <p:nvPr/>
-        </p:nvSpPr>
-        <p:spPr>
-          <a:xfrm>
-            <a:off x="6537960" y="4663440"/>
-            <a:ext cx="594360" cy="594360"/>
-          </a:xfrm>
-          <a:prstGeom prst="rect">
-            <a:avLst/>
-          </a:prstGeom>
-          <a:noFill/>
-          <a:ln/>
-        </p:spPr>
-        <p:txBody>
-          <a:bodyPr wrap="square" lIns="0" tIns="0" rIns="0" bIns="0" rtlCol="0" anchor="ctr"/>
-          <a:lstStyle/>
-          <a:p>
-            <a:pPr algn="ctr" indent="0" marL="0">
-              <a:buNone/>
-            </a:pPr>
-            <a:r>
-              <a:rPr lang="en-US" sz="2200" b="1" dirty="0">
-                <a:solidFill>
-                  <a:srgbClr val="FFFFFF"/>
-                </a:solidFill>
-                <a:latin typeface="Cambria" pitchFamily="34" charset="0"/>
-                <a:ea typeface="Cambria" pitchFamily="34" charset="-122"/>
-                <a:cs typeface="Cambria" pitchFamily="34" charset="-120"/>
-              </a:rPr>
-              <a:t>4</a:t>
-            </a:r>
-            <a:endParaRPr lang="en-US" sz="2200" dirty="0"/>
-          </a:p>
-        </p:txBody>
-      </p:sp>
-      <p:sp>
-        <p:nvSpPr>
-          <p:cNvPr id="22" name="Text 20"/>
-          <p:cNvSpPr txBox="1"/>
-          <p:nvPr/>
-        </p:nvSpPr>
-        <p:spPr>
-          <a:xfrm>
-            <a:off x="7315200" y="4617720"/>
-            <a:ext cx="3977640" cy="457200"/>
-          </a:xfrm>
-          <a:prstGeom prst="rect">
-            <a:avLst/>
-          </a:prstGeom>
-          <a:noFill/>
-          <a:ln/>
-        </p:spPr>
-        <p:txBody>
-          <a:bodyPr wrap="square" lIns="0" tIns="0" rIns="0" bIns="0" rtlCol="0" anchor="ctr"/>
-          <a:lstStyle/>
-          <a:p>
-            <a:pPr indent="0" marL="0">
-              <a:buNone/>
-            </a:pPr>
-            <a:r>
-              <a:rPr lang="en-US" sz="1800" b="1" dirty="0">
-                <a:solidFill>
-                  <a:srgbClr val="1E2761"/>
-                </a:solidFill>
-                <a:latin typeface="Calibri" pitchFamily="34" charset="0"/>
-                <a:ea typeface="Calibri" pitchFamily="34" charset="-122"/>
-                <a:cs typeface="Calibri" pitchFamily="34" charset="-120"/>
-              </a:rPr>
-              <a:t>Recontactar por prioridad</a:t>
-            </a:r>
-            <a:endParaRPr lang="en-US" sz="1800" dirty="0"/>
-          </a:p>
-        </p:txBody>
-      </p:sp>
-      <p:sp>
-        <p:nvSpPr>
-          <p:cNvPr id="23" name="Text 21"/>
-          <p:cNvSpPr txBox="1"/>
-          <p:nvPr/>
-        </p:nvSpPr>
-        <p:spPr>
-          <a:xfrm>
-            <a:off x="6537960" y="5394960"/>
-            <a:ext cx="4709160" cy="914400"/>
-          </a:xfrm>
-          <a:prstGeom prst="rect">
-            <a:avLst/>
-          </a:prstGeom>
-          <a:noFill/>
-          <a:ln/>
-        </p:spPr>
-        <p:txBody>
-          <a:bodyPr wrap="square" lIns="0" tIns="0" rIns="0" bIns="0" rtlCol="0" anchor="ctr"/>
-          <a:lstStyle/>
-          <a:p>
-            <a:pPr indent="0" marL="0">
-              <a:lnSpc>
-                <a:spcPct val="115000"/>
-              </a:lnSpc>
-              <a:buNone/>
-            </a:pPr>
-            <a:r>
-              <a:rPr lang="en-US" sz="1300" dirty="0">
-                <a:solidFill>
-                  <a:srgbClr val="36454F"/>
-                </a:solidFill>
-                <a:latin typeface="Calibri" pitchFamily="34" charset="0"/>
-                <a:ea typeface="Calibri" pitchFamily="34" charset="-122"/>
-                <a:cs typeface="Calibri" pitchFamily="34" charset="-120"/>
-              </a:rPr>
-              <a:t>Empezar por las 32 de prioridad alta, con foco en la región Sur.</a:t>
-            </a:r>
-            <a:endParaRPr lang="en-US" sz="1300" dirty="0"/>
-          </a:p>
-        </p:txBody>
-      </p:sp>
-      <p:sp>
-        <p:nvSpPr>
-          <p:cNvPr id="24" name="Text 22"/>
+              <a:rPr lang="en-US" sz="1400" dirty="0">
+                <a:solidFill>
+                  <a:srgbClr val="32373C"/>
+                </a:solidFill>
+                <a:latin typeface="Calibri" pitchFamily="34" charset="0"/>
+                <a:ea typeface="Calibri" pitchFamily="34" charset="-122"/>
+                <a:cs typeface="Calibri" pitchFamily="34" charset="-120"/>
+              </a:rPr>
+              <a:t>se concentra en la región Sur</a:t>
+            </a:r>
+            <a:endParaRPr lang="en-US" sz="1400" dirty="0"/>
+          </a:p>
+        </p:txBody>
+      </p:sp>
+      <p:graphicFrame>
+        <p:nvGraphicFramePr>
+          <p:cNvPr id="9" name="Chart 0" descr=""/>
+          <p:cNvGraphicFramePr/>
+          <p:nvPr/>
+        </p:nvGraphicFramePr>
+        <p:xfrm>
+          <a:off x="4846320" y="1737360"/>
+          <a:ext cx="6766560" cy="4206240"/>
+        </p:xfrm>
+        <a:graphic xmlns:a="http://schemas.openxmlformats.org/drawingml/2006/main">
+          <a:graphicData uri="http://schemas.openxmlformats.org/drawingml/2006/chart">
+            <c:chart xmlns:c="http://schemas.openxmlformats.org/drawingml/2006/chart" r:id="rId1"/>
+          </a:graphicData>
+        </a:graphic>
+      </p:graphicFrame>
+      <p:sp>
+        <p:nvSpPr>
+          <p:cNvPr id="10" name="Text 7"/>
           <p:cNvSpPr txBox="1"/>
           <p:nvPr/>
         </p:nvSpPr>
@@ -5728,7 +6615,7 @@
             <a:r>
               <a:rPr lang="en-US" sz="1000" dirty="0">
                 <a:solidFill>
-                  <a:srgbClr val="8892B0"/>
+                  <a:srgbClr val="9A93B5"/>
                 </a:solidFill>
                 <a:latin typeface="Calibri" pitchFamily="34" charset="0"/>
                 <a:ea typeface="Calibri" pitchFamily="34" charset="-122"/>
@@ -5742,7 +6629,7 @@
       </p:sp>
       <p:sp>
         <p:nvSpPr>
-          <p:cNvPr id="25" name="Text 23"/>
+          <p:cNvPr id="11" name="Text 8"/>
           <p:cNvSpPr txBox="1"/>
           <p:nvPr/>
         </p:nvSpPr>
@@ -5767,7 +6654,7 @@
             <a:r>
               <a:rPr lang="en-US" sz="1000" dirty="0">
                 <a:solidFill>
-                  <a:srgbClr val="8892B0"/>
+                  <a:srgbClr val="9A93B5"/>
                 </a:solidFill>
                 <a:latin typeface="Calibri" pitchFamily="34" charset="0"/>
                 <a:ea typeface="Calibri" pitchFamily="34" charset="-122"/>
@@ -5793,7 +6680,7 @@
     <p:bg>
       <p:bgPr>
         <a:solidFill>
-          <a:srgbClr val="1E2761"/>
+          <a:srgbClr val="FFFFFF"/>
         </a:solidFill>
       </p:bgPr>
     </p:bg>
@@ -5813,23 +6700,42 @@
       </p:grpSpPr>
       <p:sp>
         <p:nvSpPr>
-          <p:cNvPr id="2" name="Shape 0"/>
-          <p:cNvSpPr/>
-          <p:nvPr/>
-        </p:nvSpPr>
-        <p:spPr>
-          <a:xfrm>
-            <a:off x="-2286000" y="3474720"/>
-            <a:ext cx="5486400" cy="5486400"/>
-          </a:xfrm>
-          <a:prstGeom prst="ellipse">
-            <a:avLst/>
-          </a:prstGeom>
-          <a:solidFill>
-            <a:srgbClr val="273585"/>
-          </a:solidFill>
-          <a:ln/>
-        </p:spPr>
+          <p:cNvPr id="2" name="Text 0"/>
+          <p:cNvSpPr txBox="1"/>
+          <p:nvPr/>
+        </p:nvSpPr>
+        <p:spPr>
+          <a:xfrm>
+            <a:off x="548640" y="457200"/>
+            <a:ext cx="10972800" cy="411480"/>
+          </a:xfrm>
+          <a:prstGeom prst="rect">
+            <a:avLst/>
+          </a:prstGeom>
+          <a:noFill/>
+          <a:ln/>
+        </p:spPr>
+        <p:txBody>
+          <a:bodyPr wrap="square" lIns="0" tIns="0" rIns="0" bIns="0" rtlCol="0" anchor="ctr"/>
+          <a:lstStyle/>
+          <a:p>
+            <a:pPr indent="0" marL="0">
+              <a:buNone/>
+            </a:pPr>
+            <a:r>
+              <a:rPr lang="en-US" sz="1400" b="1" spc="150" kern="0" dirty="0">
+                <a:solidFill>
+                  <a:srgbClr val="44C5E3"/>
+                </a:solidFill>
+                <a:latin typeface="Calibri" pitchFamily="34" charset="0"/>
+                <a:ea typeface="Calibri" pitchFamily="34" charset="-122"/>
+                <a:cs typeface="Calibri" pitchFamily="34" charset="-120"/>
+              </a:rPr>
+              <a:t>QUÉ HACER CON ESTO</a:t>
+            </a:r>
+            <a:endParaRPr lang="en-US" sz="1400" dirty="0"/>
+          </a:p>
+        </p:txBody>
       </p:sp>
       <p:sp>
         <p:nvSpPr>
@@ -5839,8 +6745,8 @@
         </p:nvSpPr>
         <p:spPr>
           <a:xfrm>
-            <a:off x="548640" y="1737360"/>
-            <a:ext cx="8229600" cy="365760"/>
+            <a:off x="548640" y="868680"/>
+            <a:ext cx="10058400" cy="731520"/>
           </a:xfrm>
           <a:prstGeom prst="rect">
             <a:avLst/>
@@ -5856,30 +6762,150 @@
               <a:buNone/>
             </a:pPr>
             <a:r>
-              <a:rPr lang="en-US" sz="1400" spc="200" kern="0" dirty="0">
-                <a:solidFill>
-                  <a:srgbClr val="CADCFC"/>
-                </a:solidFill>
-                <a:latin typeface="Calibri" pitchFamily="34" charset="0"/>
-                <a:ea typeface="Calibri" pitchFamily="34" charset="-122"/>
-                <a:cs typeface="Calibri" pitchFamily="34" charset="-120"/>
-              </a:rPr>
-              <a:t>EN UNA FRASE</a:t>
-            </a:r>
-            <a:endParaRPr lang="en-US" sz="1400" dirty="0"/>
-          </a:p>
-        </p:txBody>
-      </p:sp>
-      <p:sp>
-        <p:nvSpPr>
-          <p:cNvPr id="4" name="Text 2"/>
+              <a:rPr lang="en-US" sz="3200" b="1" dirty="0">
+                <a:solidFill>
+                  <a:srgbClr val="4A3184"/>
+                </a:solidFill>
+                <a:latin typeface="Calibri" pitchFamily="34" charset="0"/>
+                <a:ea typeface="Calibri" pitchFamily="34" charset="-122"/>
+                <a:cs typeface="Calibri" pitchFamily="34" charset="-120"/>
+              </a:rPr>
+              <a:t>Cuatro acciones concretas</a:t>
+            </a:r>
+            <a:endParaRPr lang="en-US" sz="3200" dirty="0"/>
+          </a:p>
+        </p:txBody>
+      </p:sp>
+      <p:sp>
+        <p:nvSpPr>
+          <p:cNvPr id="4" name="Shape 2"/>
+          <p:cNvSpPr/>
+          <p:nvPr/>
+        </p:nvSpPr>
+        <p:spPr>
+          <a:xfrm>
+            <a:off x="548640" y="1920240"/>
+            <a:ext cx="5349240" cy="2148840"/>
+          </a:xfrm>
+          <a:prstGeom prst="roundRect">
+            <a:avLst>
+              <a:gd name="adj" fmla="val 5106"/>
+            </a:avLst>
+          </a:prstGeom>
+          <a:solidFill>
+            <a:srgbClr val="F5F3FA"/>
+          </a:solidFill>
+          <a:ln/>
+        </p:spPr>
+      </p:sp>
+      <p:sp>
+        <p:nvSpPr>
+          <p:cNvPr id="5" name="Shape 3"/>
+          <p:cNvSpPr/>
+          <p:nvPr/>
+        </p:nvSpPr>
+        <p:spPr>
+          <a:xfrm>
+            <a:off x="868680" y="2240280"/>
+            <a:ext cx="594360" cy="594360"/>
+          </a:xfrm>
+          <a:prstGeom prst="ellipse">
+            <a:avLst/>
+          </a:prstGeom>
+          <a:solidFill>
+            <a:srgbClr val="4A3184"/>
+          </a:solidFill>
+          <a:ln/>
+        </p:spPr>
+      </p:sp>
+      <p:sp>
+        <p:nvSpPr>
+          <p:cNvPr id="6" name="Text 4"/>
           <p:cNvSpPr txBox="1"/>
           <p:nvPr/>
         </p:nvSpPr>
         <p:spPr>
           <a:xfrm>
-            <a:off x="548640" y="2148840"/>
-            <a:ext cx="10515600" cy="1645920"/>
+            <a:off x="868680" y="2240280"/>
+            <a:ext cx="594360" cy="594360"/>
+          </a:xfrm>
+          <a:prstGeom prst="rect">
+            <a:avLst/>
+          </a:prstGeom>
+          <a:noFill/>
+          <a:ln/>
+        </p:spPr>
+        <p:txBody>
+          <a:bodyPr wrap="square" lIns="0" tIns="0" rIns="0" bIns="0" rtlCol="0" anchor="ctr"/>
+          <a:lstStyle/>
+          <a:p>
+            <a:pPr algn="ctr" indent="0" marL="0">
+              <a:buNone/>
+            </a:pPr>
+            <a:r>
+              <a:rPr lang="en-US" sz="2200" b="1" dirty="0">
+                <a:solidFill>
+                  <a:srgbClr val="FFFFFF"/>
+                </a:solidFill>
+                <a:latin typeface="Calibri" pitchFamily="34" charset="0"/>
+                <a:ea typeface="Calibri" pitchFamily="34" charset="-122"/>
+                <a:cs typeface="Calibri" pitchFamily="34" charset="-120"/>
+              </a:rPr>
+              <a:t>1</a:t>
+            </a:r>
+            <a:endParaRPr lang="en-US" sz="2200" dirty="0"/>
+          </a:p>
+        </p:txBody>
+      </p:sp>
+      <p:sp>
+        <p:nvSpPr>
+          <p:cNvPr id="7" name="Text 5"/>
+          <p:cNvSpPr txBox="1"/>
+          <p:nvPr/>
+        </p:nvSpPr>
+        <p:spPr>
+          <a:xfrm>
+            <a:off x="1645920" y="2194560"/>
+            <a:ext cx="3977640" cy="457200"/>
+          </a:xfrm>
+          <a:prstGeom prst="rect">
+            <a:avLst/>
+          </a:prstGeom>
+          <a:noFill/>
+          <a:ln/>
+        </p:spPr>
+        <p:txBody>
+          <a:bodyPr wrap="square" lIns="0" tIns="0" rIns="0" bIns="0" rtlCol="0" anchor="ctr"/>
+          <a:lstStyle/>
+          <a:p>
+            <a:pPr indent="0" marL="0">
+              <a:buNone/>
+            </a:pPr>
+            <a:r>
+              <a:rPr lang="en-US" sz="1800" b="1" dirty="0">
+                <a:solidFill>
+                  <a:srgbClr val="4A3184"/>
+                </a:solidFill>
+                <a:latin typeface="Calibri" pitchFamily="34" charset="0"/>
+                <a:ea typeface="Calibri" pitchFamily="34" charset="-122"/>
+                <a:cs typeface="Calibri" pitchFamily="34" charset="-120"/>
+              </a:rPr>
+              <a:t>Recuperar clientes</a:t>
+            </a:r>
+            <a:endParaRPr lang="en-US" sz="1800" dirty="0"/>
+          </a:p>
+        </p:txBody>
+      </p:sp>
+      <p:sp>
+        <p:nvSpPr>
+          <p:cNvPr id="8" name="Text 6"/>
+          <p:cNvSpPr txBox="1"/>
+          <p:nvPr/>
+        </p:nvSpPr>
+        <p:spPr>
+          <a:xfrm>
+            <a:off x="868680" y="2971800"/>
+            <a:ext cx="4709160" cy="914400"/>
           </a:xfrm>
           <a:prstGeom prst="rect">
             <a:avLst/>
@@ -5898,18 +6924,160 @@
               <a:buNone/>
             </a:pPr>
             <a:r>
-              <a:rPr lang="en-US" sz="3400" b="1" dirty="0">
+              <a:rPr lang="en-US" sz="1300" dirty="0">
+                <a:solidFill>
+                  <a:srgbClr val="32373C"/>
+                </a:solidFill>
+                <a:latin typeface="Calibri" pitchFamily="34" charset="0"/>
+                <a:ea typeface="Calibri" pitchFamily="34" charset="-122"/>
+                <a:cs typeface="Calibri" pitchFamily="34" charset="-120"/>
+              </a:rPr>
+              <a:t>Acompañamiento comercial enfocado en conseguir clientela propia — la barrera #1 en P1.</a:t>
+            </a:r>
+            <a:endParaRPr lang="en-US" sz="1300" dirty="0"/>
+          </a:p>
+        </p:txBody>
+      </p:sp>
+      <p:sp>
+        <p:nvSpPr>
+          <p:cNvPr id="9" name="Shape 7"/>
+          <p:cNvSpPr/>
+          <p:nvPr/>
+        </p:nvSpPr>
+        <p:spPr>
+          <a:xfrm>
+            <a:off x="6217920" y="1920240"/>
+            <a:ext cx="5349240" cy="2148840"/>
+          </a:xfrm>
+          <a:prstGeom prst="roundRect">
+            <a:avLst>
+              <a:gd name="adj" fmla="val 5106"/>
+            </a:avLst>
+          </a:prstGeom>
+          <a:solidFill>
+            <a:srgbClr val="F5F3FA"/>
+          </a:solidFill>
+          <a:ln/>
+        </p:spPr>
+      </p:sp>
+      <p:sp>
+        <p:nvSpPr>
+          <p:cNvPr id="10" name="Shape 8"/>
+          <p:cNvSpPr/>
+          <p:nvPr/>
+        </p:nvSpPr>
+        <p:spPr>
+          <a:xfrm>
+            <a:off x="6537960" y="2240280"/>
+            <a:ext cx="594360" cy="594360"/>
+          </a:xfrm>
+          <a:prstGeom prst="ellipse">
+            <a:avLst/>
+          </a:prstGeom>
+          <a:solidFill>
+            <a:srgbClr val="4A3184"/>
+          </a:solidFill>
+          <a:ln/>
+        </p:spPr>
+      </p:sp>
+      <p:sp>
+        <p:nvSpPr>
+          <p:cNvPr id="11" name="Text 9"/>
+          <p:cNvSpPr txBox="1"/>
+          <p:nvPr/>
+        </p:nvSpPr>
+        <p:spPr>
+          <a:xfrm>
+            <a:off x="6537960" y="2240280"/>
+            <a:ext cx="594360" cy="594360"/>
+          </a:xfrm>
+          <a:prstGeom prst="rect">
+            <a:avLst/>
+          </a:prstGeom>
+          <a:noFill/>
+          <a:ln/>
+        </p:spPr>
+        <p:txBody>
+          <a:bodyPr wrap="square" lIns="0" tIns="0" rIns="0" bIns="0" rtlCol="0" anchor="ctr"/>
+          <a:lstStyle/>
+          <a:p>
+            <a:pPr algn="ctr" indent="0" marL="0">
+              <a:buNone/>
+            </a:pPr>
+            <a:r>
+              <a:rPr lang="en-US" sz="2200" b="1" dirty="0">
                 <a:solidFill>
                   <a:srgbClr val="FFFFFF"/>
                 </a:solidFill>
-                <a:latin typeface="Cambria" pitchFamily="34" charset="0"/>
-                <a:ea typeface="Cambria" pitchFamily="34" charset="-122"/>
-                <a:cs typeface="Cambria" pitchFamily="34" charset="-120"/>
-              </a:rPr>
-              <a:t>Las distribuidoras dicen estar satisfechas,</a:t>
-            </a:r>
-            <a:endParaRPr lang="en-US" sz="3400" dirty="0"/>
-          </a:p>
+                <a:latin typeface="Calibri" pitchFamily="34" charset="0"/>
+                <a:ea typeface="Calibri" pitchFamily="34" charset="-122"/>
+                <a:cs typeface="Calibri" pitchFamily="34" charset="-120"/>
+              </a:rPr>
+              <a:t>2</a:t>
+            </a:r>
+            <a:endParaRPr lang="en-US" sz="2200" dirty="0"/>
+          </a:p>
+        </p:txBody>
+      </p:sp>
+      <p:sp>
+        <p:nvSpPr>
+          <p:cNvPr id="12" name="Text 10"/>
+          <p:cNvSpPr txBox="1"/>
+          <p:nvPr/>
+        </p:nvSpPr>
+        <p:spPr>
+          <a:xfrm>
+            <a:off x="7315200" y="2194560"/>
+            <a:ext cx="3977640" cy="457200"/>
+          </a:xfrm>
+          <a:prstGeom prst="rect">
+            <a:avLst/>
+          </a:prstGeom>
+          <a:noFill/>
+          <a:ln/>
+        </p:spPr>
+        <p:txBody>
+          <a:bodyPr wrap="square" lIns="0" tIns="0" rIns="0" bIns="0" rtlCol="0" anchor="ctr"/>
+          <a:lstStyle/>
+          <a:p>
+            <a:pPr indent="0" marL="0">
+              <a:buNone/>
+            </a:pPr>
+            <a:r>
+              <a:rPr lang="en-US" sz="1800" b="1" dirty="0">
+                <a:solidFill>
+                  <a:srgbClr val="4A3184"/>
+                </a:solidFill>
+                <a:latin typeface="Calibri" pitchFamily="34" charset="0"/>
+                <a:ea typeface="Calibri" pitchFamily="34" charset="-122"/>
+                <a:cs typeface="Calibri" pitchFamily="34" charset="-120"/>
+              </a:rPr>
+              <a:t>Igualar condiciones</a:t>
+            </a:r>
+            <a:endParaRPr lang="en-US" sz="1800" dirty="0"/>
+          </a:p>
+        </p:txBody>
+      </p:sp>
+      <p:sp>
+        <p:nvSpPr>
+          <p:cNvPr id="13" name="Text 11"/>
+          <p:cNvSpPr txBox="1"/>
+          <p:nvPr/>
+        </p:nvSpPr>
+        <p:spPr>
+          <a:xfrm>
+            <a:off x="6537960" y="2971800"/>
+            <a:ext cx="4709160" cy="914400"/>
+          </a:xfrm>
+          <a:prstGeom prst="rect">
+            <a:avLst/>
+          </a:prstGeom>
+          <a:noFill/>
+          <a:ln/>
+        </p:spPr>
+        <p:txBody>
+          <a:bodyPr wrap="square" lIns="0" tIns="0" rIns="0" bIns="0" rtlCol="0" anchor="ctr"/>
+          <a:lstStyle/>
           <a:p>
             <a:pPr indent="0" marL="0">
               <a:lnSpc>
@@ -5918,23 +7086,608 @@
               <a:buNone/>
             </a:pPr>
             <a:r>
-              <a:rPr lang="en-US" sz="3400" b="1" dirty="0">
+              <a:rPr lang="en-US" sz="1300" dirty="0">
+                <a:solidFill>
+                  <a:srgbClr val="32373C"/>
+                </a:solidFill>
+                <a:latin typeface="Calibri" pitchFamily="34" charset="0"/>
+                <a:ea typeface="Calibri" pitchFamily="34" charset="-122"/>
+                <a:cs typeface="Calibri" pitchFamily="34" charset="-120"/>
+              </a:rPr>
+              <a:t>Revisar plazos, días de pago, comisiones y vales digitales frente a lo que ofrece la competencia.</a:t>
+            </a:r>
+            <a:endParaRPr lang="en-US" sz="1300" dirty="0"/>
+          </a:p>
+        </p:txBody>
+      </p:sp>
+      <p:sp>
+        <p:nvSpPr>
+          <p:cNvPr id="14" name="Shape 12"/>
+          <p:cNvSpPr/>
+          <p:nvPr/>
+        </p:nvSpPr>
+        <p:spPr>
+          <a:xfrm>
+            <a:off x="548640" y="4343400"/>
+            <a:ext cx="5349240" cy="2148840"/>
+          </a:xfrm>
+          <a:prstGeom prst="roundRect">
+            <a:avLst>
+              <a:gd name="adj" fmla="val 5106"/>
+            </a:avLst>
+          </a:prstGeom>
+          <a:solidFill>
+            <a:srgbClr val="F5F3FA"/>
+          </a:solidFill>
+          <a:ln/>
+        </p:spPr>
+      </p:sp>
+      <p:sp>
+        <p:nvSpPr>
+          <p:cNvPr id="15" name="Shape 13"/>
+          <p:cNvSpPr/>
+          <p:nvPr/>
+        </p:nvSpPr>
+        <p:spPr>
+          <a:xfrm>
+            <a:off x="868680" y="4663440"/>
+            <a:ext cx="594360" cy="594360"/>
+          </a:xfrm>
+          <a:prstGeom prst="ellipse">
+            <a:avLst/>
+          </a:prstGeom>
+          <a:solidFill>
+            <a:srgbClr val="4A3184"/>
+          </a:solidFill>
+          <a:ln/>
+        </p:spPr>
+      </p:sp>
+      <p:sp>
+        <p:nvSpPr>
+          <p:cNvPr id="16" name="Text 14"/>
+          <p:cNvSpPr txBox="1"/>
+          <p:nvPr/>
+        </p:nvSpPr>
+        <p:spPr>
+          <a:xfrm>
+            <a:off x="868680" y="4663440"/>
+            <a:ext cx="594360" cy="594360"/>
+          </a:xfrm>
+          <a:prstGeom prst="rect">
+            <a:avLst/>
+          </a:prstGeom>
+          <a:noFill/>
+          <a:ln/>
+        </p:spPr>
+        <p:txBody>
+          <a:bodyPr wrap="square" lIns="0" tIns="0" rIns="0" bIns="0" rtlCol="0" anchor="ctr"/>
+          <a:lstStyle/>
+          <a:p>
+            <a:pPr algn="ctr" indent="0" marL="0">
+              <a:buNone/>
+            </a:pPr>
+            <a:r>
+              <a:rPr lang="en-US" sz="2200" b="1" dirty="0">
                 <a:solidFill>
                   <a:srgbClr val="FFFFFF"/>
                 </a:solidFill>
-                <a:latin typeface="Cambria" pitchFamily="34" charset="0"/>
-                <a:ea typeface="Cambria" pitchFamily="34" charset="-122"/>
-                <a:cs typeface="Cambria" pitchFamily="34" charset="-120"/>
+                <a:latin typeface="Calibri" pitchFamily="34" charset="0"/>
+                <a:ea typeface="Calibri" pitchFamily="34" charset="-122"/>
+                <a:cs typeface="Calibri" pitchFamily="34" charset="-120"/>
+              </a:rPr>
+              <a:t>3</a:t>
+            </a:r>
+            <a:endParaRPr lang="en-US" sz="2200" dirty="0"/>
+          </a:p>
+        </p:txBody>
+      </p:sp>
+      <p:sp>
+        <p:nvSpPr>
+          <p:cNvPr id="17" name="Text 15"/>
+          <p:cNvSpPr txBox="1"/>
+          <p:nvPr/>
+        </p:nvSpPr>
+        <p:spPr>
+          <a:xfrm>
+            <a:off x="1645920" y="4617720"/>
+            <a:ext cx="3977640" cy="457200"/>
+          </a:xfrm>
+          <a:prstGeom prst="rect">
+            <a:avLst/>
+          </a:prstGeom>
+          <a:noFill/>
+          <a:ln/>
+        </p:spPr>
+        <p:txBody>
+          <a:bodyPr wrap="square" lIns="0" tIns="0" rIns="0" bIns="0" rtlCol="0" anchor="ctr"/>
+          <a:lstStyle/>
+          <a:p>
+            <a:pPr indent="0" marL="0">
+              <a:buNone/>
+            </a:pPr>
+            <a:r>
+              <a:rPr lang="en-US" sz="1800" b="1" dirty="0">
+                <a:solidFill>
+                  <a:srgbClr val="4A3184"/>
+                </a:solidFill>
+                <a:latin typeface="Calibri" pitchFamily="34" charset="0"/>
+                <a:ea typeface="Calibri" pitchFamily="34" charset="-122"/>
+                <a:cs typeface="Calibri" pitchFamily="34" charset="-120"/>
+              </a:rPr>
+              <a:t>Reforzar soporte</a:t>
+            </a:r>
+            <a:endParaRPr lang="en-US" sz="1800" dirty="0"/>
+          </a:p>
+        </p:txBody>
+      </p:sp>
+      <p:sp>
+        <p:nvSpPr>
+          <p:cNvPr id="18" name="Text 16"/>
+          <p:cNvSpPr txBox="1"/>
+          <p:nvPr/>
+        </p:nvSpPr>
+        <p:spPr>
+          <a:xfrm>
+            <a:off x="868680" y="5394960"/>
+            <a:ext cx="4709160" cy="914400"/>
+          </a:xfrm>
+          <a:prstGeom prst="rect">
+            <a:avLst/>
+          </a:prstGeom>
+          <a:noFill/>
+          <a:ln/>
+        </p:spPr>
+        <p:txBody>
+          <a:bodyPr wrap="square" lIns="0" tIns="0" rIns="0" bIns="0" rtlCol="0" anchor="ctr"/>
+          <a:lstStyle/>
+          <a:p>
+            <a:pPr indent="0" marL="0">
+              <a:lnSpc>
+                <a:spcPct val="115000"/>
+              </a:lnSpc>
+              <a:buNone/>
+            </a:pPr>
+            <a:r>
+              <a:rPr lang="en-US" sz="1300" dirty="0">
+                <a:solidFill>
+                  <a:srgbClr val="32373C"/>
+                </a:solidFill>
+                <a:latin typeface="Calibri" pitchFamily="34" charset="0"/>
+                <a:ea typeface="Calibri" pitchFamily="34" charset="-122"/>
+                <a:cs typeface="Calibri" pitchFamily="34" charset="-120"/>
+              </a:rPr>
+              <a:t>Más presencia de gestoría, cobranza y seguimiento de coordinadores — el reclamo más citado.</a:t>
+            </a:r>
+            <a:endParaRPr lang="en-US" sz="1300" dirty="0"/>
+          </a:p>
+        </p:txBody>
+      </p:sp>
+      <p:sp>
+        <p:nvSpPr>
+          <p:cNvPr id="19" name="Shape 17"/>
+          <p:cNvSpPr/>
+          <p:nvPr/>
+        </p:nvSpPr>
+        <p:spPr>
+          <a:xfrm>
+            <a:off x="6217920" y="4343400"/>
+            <a:ext cx="5349240" cy="2148840"/>
+          </a:xfrm>
+          <a:prstGeom prst="roundRect">
+            <a:avLst>
+              <a:gd name="adj" fmla="val 5106"/>
+            </a:avLst>
+          </a:prstGeom>
+          <a:solidFill>
+            <a:srgbClr val="F5F3FA"/>
+          </a:solidFill>
+          <a:ln/>
+        </p:spPr>
+      </p:sp>
+      <p:sp>
+        <p:nvSpPr>
+          <p:cNvPr id="20" name="Shape 18"/>
+          <p:cNvSpPr/>
+          <p:nvPr/>
+        </p:nvSpPr>
+        <p:spPr>
+          <a:xfrm>
+            <a:off x="6537960" y="4663440"/>
+            <a:ext cx="594360" cy="594360"/>
+          </a:xfrm>
+          <a:prstGeom prst="ellipse">
+            <a:avLst/>
+          </a:prstGeom>
+          <a:solidFill>
+            <a:srgbClr val="4A3184"/>
+          </a:solidFill>
+          <a:ln/>
+        </p:spPr>
+      </p:sp>
+      <p:sp>
+        <p:nvSpPr>
+          <p:cNvPr id="21" name="Text 19"/>
+          <p:cNvSpPr txBox="1"/>
+          <p:nvPr/>
+        </p:nvSpPr>
+        <p:spPr>
+          <a:xfrm>
+            <a:off x="6537960" y="4663440"/>
+            <a:ext cx="594360" cy="594360"/>
+          </a:xfrm>
+          <a:prstGeom prst="rect">
+            <a:avLst/>
+          </a:prstGeom>
+          <a:noFill/>
+          <a:ln/>
+        </p:spPr>
+        <p:txBody>
+          <a:bodyPr wrap="square" lIns="0" tIns="0" rIns="0" bIns="0" rtlCol="0" anchor="ctr"/>
+          <a:lstStyle/>
+          <a:p>
+            <a:pPr algn="ctr" indent="0" marL="0">
+              <a:buNone/>
+            </a:pPr>
+            <a:r>
+              <a:rPr lang="en-US" sz="2200" b="1" dirty="0">
+                <a:solidFill>
+                  <a:srgbClr val="FFFFFF"/>
+                </a:solidFill>
+                <a:latin typeface="Calibri" pitchFamily="34" charset="0"/>
+                <a:ea typeface="Calibri" pitchFamily="34" charset="-122"/>
+                <a:cs typeface="Calibri" pitchFamily="34" charset="-120"/>
+              </a:rPr>
+              <a:t>4</a:t>
+            </a:r>
+            <a:endParaRPr lang="en-US" sz="2200" dirty="0"/>
+          </a:p>
+        </p:txBody>
+      </p:sp>
+      <p:sp>
+        <p:nvSpPr>
+          <p:cNvPr id="22" name="Text 20"/>
+          <p:cNvSpPr txBox="1"/>
+          <p:nvPr/>
+        </p:nvSpPr>
+        <p:spPr>
+          <a:xfrm>
+            <a:off x="7315200" y="4617720"/>
+            <a:ext cx="3977640" cy="457200"/>
+          </a:xfrm>
+          <a:prstGeom prst="rect">
+            <a:avLst/>
+          </a:prstGeom>
+          <a:noFill/>
+          <a:ln/>
+        </p:spPr>
+        <p:txBody>
+          <a:bodyPr wrap="square" lIns="0" tIns="0" rIns="0" bIns="0" rtlCol="0" anchor="ctr"/>
+          <a:lstStyle/>
+          <a:p>
+            <a:pPr indent="0" marL="0">
+              <a:buNone/>
+            </a:pPr>
+            <a:r>
+              <a:rPr lang="en-US" sz="1800" b="1" dirty="0">
+                <a:solidFill>
+                  <a:srgbClr val="4A3184"/>
+                </a:solidFill>
+                <a:latin typeface="Calibri" pitchFamily="34" charset="0"/>
+                <a:ea typeface="Calibri" pitchFamily="34" charset="-122"/>
+                <a:cs typeface="Calibri" pitchFamily="34" charset="-120"/>
+              </a:rPr>
+              <a:t>Recontactar por prioridad</a:t>
+            </a:r>
+            <a:endParaRPr lang="en-US" sz="1800" dirty="0"/>
+          </a:p>
+        </p:txBody>
+      </p:sp>
+      <p:sp>
+        <p:nvSpPr>
+          <p:cNvPr id="23" name="Text 21"/>
+          <p:cNvSpPr txBox="1"/>
+          <p:nvPr/>
+        </p:nvSpPr>
+        <p:spPr>
+          <a:xfrm>
+            <a:off x="6537960" y="5394960"/>
+            <a:ext cx="4709160" cy="914400"/>
+          </a:xfrm>
+          <a:prstGeom prst="rect">
+            <a:avLst/>
+          </a:prstGeom>
+          <a:noFill/>
+          <a:ln/>
+        </p:spPr>
+        <p:txBody>
+          <a:bodyPr wrap="square" lIns="0" tIns="0" rIns="0" bIns="0" rtlCol="0" anchor="ctr"/>
+          <a:lstStyle/>
+          <a:p>
+            <a:pPr indent="0" marL="0">
+              <a:lnSpc>
+                <a:spcPct val="115000"/>
+              </a:lnSpc>
+              <a:buNone/>
+            </a:pPr>
+            <a:r>
+              <a:rPr lang="en-US" sz="1300" dirty="0">
+                <a:solidFill>
+                  <a:srgbClr val="32373C"/>
+                </a:solidFill>
+                <a:latin typeface="Calibri" pitchFamily="34" charset="0"/>
+                <a:ea typeface="Calibri" pitchFamily="34" charset="-122"/>
+                <a:cs typeface="Calibri" pitchFamily="34" charset="-120"/>
+              </a:rPr>
+              <a:t>Empezar por las 32 de prioridad alta, con foco en la región Sur.</a:t>
+            </a:r>
+            <a:endParaRPr lang="en-US" sz="1300" dirty="0"/>
+          </a:p>
+        </p:txBody>
+      </p:sp>
+      <p:sp>
+        <p:nvSpPr>
+          <p:cNvPr id="24" name="Text 22"/>
+          <p:cNvSpPr txBox="1"/>
+          <p:nvPr/>
+        </p:nvSpPr>
+        <p:spPr>
+          <a:xfrm>
+            <a:off x="548640" y="6446520"/>
+            <a:ext cx="5486400" cy="274320"/>
+          </a:xfrm>
+          <a:prstGeom prst="rect">
+            <a:avLst/>
+          </a:prstGeom>
+          <a:noFill/>
+          <a:ln/>
+        </p:spPr>
+        <p:txBody>
+          <a:bodyPr wrap="square" lIns="0" tIns="0" rIns="0" bIns="0" rtlCol="0" anchor="ctr"/>
+          <a:lstStyle/>
+          <a:p>
+            <a:pPr indent="0" marL="0">
+              <a:buNone/>
+            </a:pPr>
+            <a:r>
+              <a:rPr lang="en-US" sz="1000" dirty="0">
+                <a:solidFill>
+                  <a:srgbClr val="9A93B5"/>
+                </a:solidFill>
+                <a:latin typeface="Calibri" pitchFamily="34" charset="0"/>
+                <a:ea typeface="Calibri" pitchFamily="34" charset="-122"/>
+                <a:cs typeface="Calibri" pitchFamily="34" charset="-120"/>
+              </a:rPr>
+              <a:t>Encuesta de Experiencia Comercial · CRECE CON VALES</a:t>
+            </a:r>
+            <a:endParaRPr lang="en-US" sz="1000" dirty="0"/>
+          </a:p>
+        </p:txBody>
+      </p:sp>
+      <p:sp>
+        <p:nvSpPr>
+          <p:cNvPr id="25" name="Text 23"/>
+          <p:cNvSpPr txBox="1"/>
+          <p:nvPr/>
+        </p:nvSpPr>
+        <p:spPr>
+          <a:xfrm>
+            <a:off x="11183112" y="6446520"/>
+            <a:ext cx="457200" cy="274320"/>
+          </a:xfrm>
+          <a:prstGeom prst="rect">
+            <a:avLst/>
+          </a:prstGeom>
+          <a:noFill/>
+          <a:ln/>
+        </p:spPr>
+        <p:txBody>
+          <a:bodyPr wrap="square" lIns="0" tIns="0" rIns="0" bIns="0" rtlCol="0" anchor="ctr"/>
+          <a:lstStyle/>
+          <a:p>
+            <a:pPr algn="r" indent="0" marL="0">
+              <a:buNone/>
+            </a:pPr>
+            <a:r>
+              <a:rPr lang="en-US" sz="1000" dirty="0">
+                <a:solidFill>
+                  <a:srgbClr val="9A93B5"/>
+                </a:solidFill>
+                <a:latin typeface="Calibri" pitchFamily="34" charset="0"/>
+                <a:ea typeface="Calibri" pitchFamily="34" charset="-122"/>
+                <a:cs typeface="Calibri" pitchFamily="34" charset="-120"/>
+              </a:rPr>
+              <a:t>8</a:t>
+            </a:r>
+            <a:endParaRPr lang="en-US" sz="1000" dirty="0"/>
+          </a:p>
+        </p:txBody>
+      </p:sp>
+    </p:spTree>
+  </p:cSld>
+  <p:clrMapOvr>
+    <a:masterClrMapping/>
+  </p:clrMapOvr>
+</p:sld>
+</file>
+
+<file path=ppt/slides/slide9.xml><?xml version="1.0" encoding="utf-8"?>
+<p:sld xmlns:a="http://schemas.openxmlformats.org/drawingml/2006/main" xmlns:r="http://schemas.openxmlformats.org/officeDocument/2006/relationships" xmlns:p="http://schemas.openxmlformats.org/presentationml/2006/main">
+  <p:cSld name="Slide 9">
+    <p:bg>
+      <p:bgPr>
+        <a:solidFill>
+          <a:srgbClr val="4A3184"/>
+        </a:solidFill>
+      </p:bgPr>
+    </p:bg>
+    <p:spTree>
+      <p:nvGrpSpPr>
+        <p:cNvPr id="1" name=""/>
+        <p:cNvGrpSpPr/>
+        <p:nvPr/>
+      </p:nvGrpSpPr>
+      <p:grpSpPr>
+        <a:xfrm>
+          <a:off x="0" y="0"/>
+          <a:ext cx="0" cy="0"/>
+          <a:chOff x="0" y="0"/>
+          <a:chExt cx="0" cy="0"/>
+        </a:xfrm>
+      </p:grpSpPr>
+      <p:pic>
+        <p:nvPicPr>
+          <p:cNvPr id="2" name="Image 0" descr="plane_icon_white.png">    </p:cNvPr>
+          <p:cNvPicPr>
+            <a:picLocks noChangeAspect="1"/>
+          </p:cNvPicPr>
+          <p:nvPr/>
+        </p:nvPicPr>
+        <p:blipFill>
+          <a:blip r:embed="rId1">
+            <a:alphaModFix amt="18000"/>
+          </a:blip>
+          <a:stretch>
+            <a:fillRect/>
+          </a:stretch>
+        </p:blipFill>
+        <p:spPr>
+          <a:xfrm rot="-720000">
+            <a:off x="8412480" y="-1371600"/>
+            <a:ext cx="5029200" cy="4572000"/>
+          </a:xfrm>
+          <a:prstGeom prst="rect">
+            <a:avLst/>
+          </a:prstGeom>
+        </p:spPr>
+      </p:pic>
+      <p:pic>
+        <p:nvPicPr>
+          <p:cNvPr id="3" name="Image 1" descr="logocrece.png">    </p:cNvPr>
+          <p:cNvPicPr>
+            <a:picLocks noChangeAspect="1"/>
+          </p:cNvPicPr>
+          <p:nvPr/>
+        </p:nvPicPr>
+        <p:blipFill>
+          <a:blip r:embed="rId2"/>
+          <a:stretch>
+            <a:fillRect/>
+          </a:stretch>
+        </p:blipFill>
+        <p:spPr>
+          <a:xfrm>
+            <a:off x="548640" y="502920"/>
+            <a:ext cx="2286000" cy="641909"/>
+          </a:xfrm>
+          <a:prstGeom prst="rect">
+            <a:avLst/>
+          </a:prstGeom>
+        </p:spPr>
+      </p:pic>
+      <p:sp>
+        <p:nvSpPr>
+          <p:cNvPr id="4" name="Text 0"/>
+          <p:cNvSpPr txBox="1"/>
+          <p:nvPr/>
+        </p:nvSpPr>
+        <p:spPr>
+          <a:xfrm>
+            <a:off x="548640" y="1737360"/>
+            <a:ext cx="8229600" cy="365760"/>
+          </a:xfrm>
+          <a:prstGeom prst="rect">
+            <a:avLst/>
+          </a:prstGeom>
+          <a:noFill/>
+          <a:ln/>
+        </p:spPr>
+        <p:txBody>
+          <a:bodyPr wrap="square" lIns="0" tIns="0" rIns="0" bIns="0" rtlCol="0" anchor="ctr"/>
+          <a:lstStyle/>
+          <a:p>
+            <a:pPr indent="0" marL="0">
+              <a:buNone/>
+            </a:pPr>
+            <a:r>
+              <a:rPr lang="en-US" sz="1400" b="1" spc="200" kern="0" dirty="0">
+                <a:solidFill>
+                  <a:srgbClr val="44C5E3"/>
+                </a:solidFill>
+                <a:latin typeface="Calibri" pitchFamily="34" charset="0"/>
+                <a:ea typeface="Calibri" pitchFamily="34" charset="-122"/>
+                <a:cs typeface="Calibri" pitchFamily="34" charset="-120"/>
+              </a:rPr>
+              <a:t>EN UNA FRASE</a:t>
+            </a:r>
+            <a:endParaRPr lang="en-US" sz="1400" dirty="0"/>
+          </a:p>
+        </p:txBody>
+      </p:sp>
+      <p:sp>
+        <p:nvSpPr>
+          <p:cNvPr id="5" name="Text 1"/>
+          <p:cNvSpPr txBox="1"/>
+          <p:nvPr/>
+        </p:nvSpPr>
+        <p:spPr>
+          <a:xfrm>
+            <a:off x="548640" y="2148840"/>
+            <a:ext cx="10515600" cy="1645920"/>
+          </a:xfrm>
+          <a:prstGeom prst="rect">
+            <a:avLst/>
+          </a:prstGeom>
+          <a:noFill/>
+          <a:ln/>
+        </p:spPr>
+        <p:txBody>
+          <a:bodyPr wrap="square" lIns="0" tIns="0" rIns="0" bIns="0" rtlCol="0" anchor="ctr"/>
+          <a:lstStyle/>
+          <a:p>
+            <a:pPr indent="0" marL="0">
+              <a:lnSpc>
+                <a:spcPct val="115000"/>
+              </a:lnSpc>
+              <a:buNone/>
+            </a:pPr>
+            <a:r>
+              <a:rPr lang="en-US" sz="3200" b="1" dirty="0">
+                <a:solidFill>
+                  <a:srgbClr val="FFFFFF"/>
+                </a:solidFill>
+                <a:latin typeface="Calibri" pitchFamily="34" charset="0"/>
+                <a:ea typeface="Calibri" pitchFamily="34" charset="-122"/>
+                <a:cs typeface="Calibri" pitchFamily="34" charset="-120"/>
+              </a:rPr>
+              <a:t>Las distribuidoras dicen estar satisfechas,</a:t>
+            </a:r>
+            <a:endParaRPr lang="en-US" sz="3200" dirty="0"/>
+          </a:p>
+          <a:p>
+            <a:pPr indent="0" marL="0">
+              <a:lnSpc>
+                <a:spcPct val="115000"/>
+              </a:lnSpc>
+              <a:buNone/>
+            </a:pPr>
+            <a:r>
+              <a:rPr lang="en-US" sz="3200" b="1" dirty="0">
+                <a:solidFill>
+                  <a:srgbClr val="FFFFFF"/>
+                </a:solidFill>
+                <a:latin typeface="Calibri" pitchFamily="34" charset="0"/>
+                <a:ea typeface="Calibri" pitchFamily="34" charset="-122"/>
+                <a:cs typeface="Calibri" pitchFamily="34" charset="-120"/>
               </a:rPr>
               <a:t>pero el negocio no se está moviendo.</a:t>
             </a:r>
-            <a:endParaRPr lang="en-US" sz="3400" dirty="0"/>
-          </a:p>
-        </p:txBody>
-      </p:sp>
-      <p:sp>
-        <p:nvSpPr>
-          <p:cNvPr id="5" name="Text 3"/>
+            <a:endParaRPr lang="en-US" sz="3200" dirty="0"/>
+          </a:p>
+        </p:txBody>
+      </p:sp>
+      <p:sp>
+        <p:nvSpPr>
+          <p:cNvPr id="6" name="Text 2"/>
           <p:cNvSpPr txBox="1"/>
           <p:nvPr/>
         </p:nvSpPr>
@@ -5962,7 +7715,7 @@
             <a:r>
               <a:rPr lang="en-US" sz="1600" dirty="0">
                 <a:solidFill>
-                  <a:srgbClr val="CADCFC"/>
+                  <a:srgbClr val="E4DEF2"/>
                 </a:solidFill>
                 <a:latin typeface="Calibri" pitchFamily="34" charset="0"/>
                 <a:ea typeface="Calibri" pitchFamily="34" charset="-122"/>
@@ -5982,7 +7735,7 @@
             <a:r>
               <a:rPr lang="en-US" sz="1600" dirty="0">
                 <a:solidFill>
-                  <a:srgbClr val="CADCFC"/>
+                  <a:srgbClr val="E4DEF2"/>
                 </a:solidFill>
                 <a:latin typeface="Calibri" pitchFamily="34" charset="0"/>
                 <a:ea typeface="Calibri" pitchFamily="34" charset="-122"/>
@@ -5996,7 +7749,7 @@
       </p:sp>
       <p:sp>
         <p:nvSpPr>
-          <p:cNvPr id="6" name="Text 4"/>
+          <p:cNvPr id="7" name="Text 3"/>
           <p:cNvSpPr txBox="1"/>
           <p:nvPr/>
         </p:nvSpPr>
@@ -6021,7 +7774,7 @@
             <a:r>
               <a:rPr lang="en-US" sz="1100" dirty="0">
                 <a:solidFill>
-                  <a:srgbClr val="8892B0"/>
+                  <a:srgbClr val="9A93B5"/>
                 </a:solidFill>
                 <a:latin typeface="Calibri" pitchFamily="34" charset="0"/>
                 <a:ea typeface="Calibri" pitchFamily="34" charset="-122"/>
